--- a/docs/adr-033-decks/mentible-for-physicians.pptx
+++ b/docs/adr-033-decks/mentible-for-physicians.pptx
@@ -13,6 +13,7 @@
     <p:sldId id="261" r:id="rId12"/>
     <p:sldId id="262" r:id="rId13"/>
     <p:sldId id="263" r:id="rId14"/>
+    <p:sldId id="264" r:id="rId15"/>
   </p:sldIdLst>
   <p:sldSz cx="12191695" cy="6858000" type="screen4x3"/>
   <p:notesSz cx="6858000" cy="9144000"/>
@@ -3810,7 +3811,7 @@
                 </a:solidFill>
                 <a:latin typeface="Georgia"/>
               </a:rPr>
-              <a:t>I read only what you trust, and I cite it back to you. No guessing near a patient.</a:t>
+              <a:t>I answer only from the sources you give me, and I show my citations — so you verify before anything reaches a patient.</a:t>
             </a:r>
           </a:p>
         </p:txBody>
@@ -5924,16 +5925,16 @@
                 </a:solidFill>
                 <a:latin typeface="Consolas"/>
               </a:rPr>
-              <a:t>✓ On the free tier I live entirely on your device. </a:t>
-            </a:r>
-            <a:r>
-              <a:rPr sz="1300" b="0" i="0">
+              <a:t>✓ Free tier: your library stays on your device. </a:t>
+            </a:r>
+            <a:r>
+              <a:rPr sz="1250" b="0" i="0">
                 <a:solidFill>
                   <a:srgbClr val="17242E"/>
                 </a:solidFill>
                 <a:latin typeface="Georgia"/>
               </a:rPr>
-              <a:t>I can't see your library — and neither can anyone else.</a:t>
+              <a:t>What happens to a note when you ask the AI to use it → next slide.</a:t>
             </a:r>
           </a:p>
         </p:txBody>
@@ -6161,7 +6162,7 @@
                 </a:solidFill>
                 <a:latin typeface="Consolas"/>
               </a:rPr>
-              <a:t>SECTION 03 — YOUR KNOWLEDGE LIBRARY</a:t>
+              <a:t>SECTION 02b — PATIENT DATA (PHI)</a:t>
             </a:r>
           </a:p>
         </p:txBody>
@@ -6427,7 +6428,7 @@
         <p:spPr>
           <a:xfrm>
             <a:off x="822960" y="960120"/>
-            <a:ext cx="10607040" cy="548640"/>
+            <a:ext cx="10607040" cy="640080"/>
           </a:xfrm>
           <a:prstGeom prst="rect">
             <a:avLst/>
@@ -6452,7 +6453,7 @@
                 </a:solidFill>
                 <a:latin typeface="Georgia"/>
               </a:rPr>
-              <a:t>This becomes your knowledge library</a:t>
+              <a:t>Before you add patient data — the honest version</a:t>
             </a:r>
           </a:p>
         </p:txBody>
@@ -6465,8 +6466,8 @@
         </p:nvSpPr>
         <p:spPr>
           <a:xfrm>
-            <a:off x="822960" y="1554480"/>
-            <a:ext cx="10424160" cy="548640"/>
+            <a:off x="822960" y="1645920"/>
+            <a:ext cx="10424160" cy="457200"/>
           </a:xfrm>
           <a:prstGeom prst="rect">
             <a:avLst/>
@@ -6480,65 +6481,182 @@
           <a:lstStyle/>
           <a:p>
             <a:pPr algn="l">
+              <a:spcAft>
+                <a:spcPts val="0"/>
+              </a:spcAft>
+            </a:pPr>
+            <a:r>
+              <a:rPr sz="1300" b="0" i="0">
+                <a:solidFill>
+                  <a:srgbClr val="5A6A72"/>
+                </a:solidFill>
+                <a:latin typeface="Georgia"/>
+              </a:rPr>
+              <a:t>A “Case notes” tab can hold PHI. Here is exactly where it goes on each tier — so you decide, not discover.</a:t>
+            </a:r>
+          </a:p>
+        </p:txBody>
+      </p:sp>
+      <p:sp>
+        <p:nvSpPr>
+          <p:cNvPr id="16" name="Rounded Rectangle 15"/>
+          <p:cNvSpPr/>
+          <p:nvPr/>
+        </p:nvSpPr>
+        <p:spPr>
+          <a:xfrm>
+            <a:off x="822960" y="2331720"/>
+            <a:ext cx="5120640" cy="2148840"/>
+          </a:xfrm>
+          <a:prstGeom prst="roundRect">
+            <a:avLst>
+              <a:gd name="adj" fmla="val 5000"/>
+            </a:avLst>
+          </a:prstGeom>
+          <a:solidFill>
+            <a:srgbClr val="FFFFFF"/>
+          </a:solidFill>
+          <a:ln w="19050">
+            <a:solidFill>
+              <a:srgbClr val="2F8F83"/>
+            </a:solidFill>
+          </a:ln>
+          <a:effectLst/>
+        </p:spPr>
+        <p:style>
+          <a:lnRef idx="1">
+            <a:schemeClr val="accent1"/>
+          </a:lnRef>
+          <a:fillRef idx="3">
+            <a:schemeClr val="accent1"/>
+          </a:fillRef>
+          <a:effectRef idx="2">
+            <a:schemeClr val="accent1"/>
+          </a:effectRef>
+          <a:fontRef idx="minor">
+            <a:schemeClr val="lt1"/>
+          </a:fontRef>
+        </p:style>
+        <p:txBody>
+          <a:bodyPr rtlCol="0" anchor="ctr"/>
+          <a:lstStyle/>
+          <a:p>
+            <a:pPr algn="ctr"/>
+          </a:p>
+        </p:txBody>
+      </p:sp>
+      <p:sp>
+        <p:nvSpPr>
+          <p:cNvPr id="17" name="TextBox 16"/>
+          <p:cNvSpPr txBox="1"/>
+          <p:nvPr/>
+        </p:nvSpPr>
+        <p:spPr>
+          <a:xfrm>
+            <a:off x="1097280" y="2542032"/>
+            <a:ext cx="4572000" cy="320040"/>
+          </a:xfrm>
+          <a:prstGeom prst="rect">
+            <a:avLst/>
+          </a:prstGeom>
+          <a:noFill/>
+        </p:spPr>
+        <p:txBody>
+          <a:bodyPr wrap="square" anchor="t" lIns="0" rIns="0" tIns="0" bIns="0">
+            <a:spAutoFit/>
+          </a:bodyPr>
+          <a:lstStyle/>
+          <a:p>
+            <a:pPr algn="l">
+              <a:spcAft>
+                <a:spcPts val="0"/>
+              </a:spcAft>
+            </a:pPr>
+            <a:r>
+              <a:rPr sz="1100" b="1" i="0">
+                <a:solidFill>
+                  <a:srgbClr val="2F8F83"/>
+                </a:solidFill>
+                <a:latin typeface="Consolas"/>
+              </a:rPr>
+              <a:t>FREE · ON YOUR DEVICE</a:t>
+            </a:r>
+          </a:p>
+        </p:txBody>
+      </p:sp>
+      <p:sp>
+        <p:nvSpPr>
+          <p:cNvPr id="18" name="TextBox 17"/>
+          <p:cNvSpPr txBox="1"/>
+          <p:nvPr/>
+        </p:nvSpPr>
+        <p:spPr>
+          <a:xfrm>
+            <a:off x="1097280" y="2926080"/>
+            <a:ext cx="4617720" cy="1463040"/>
+          </a:xfrm>
+          <a:prstGeom prst="rect">
+            <a:avLst/>
+          </a:prstGeom>
+          <a:noFill/>
+        </p:spPr>
+        <p:txBody>
+          <a:bodyPr wrap="square" anchor="t" lIns="0" rIns="0" tIns="0" bIns="0">
+            <a:spAutoFit/>
+          </a:bodyPr>
+          <a:lstStyle/>
+          <a:p>
+            <a:pPr algn="l">
               <a:lnSpc>
-                <a:spcPct val="105000"/>
+                <a:spcPct val="110000"/>
               </a:lnSpc>
               <a:spcAft>
                 <a:spcPts val="0"/>
               </a:spcAft>
             </a:pPr>
             <a:r>
-              <a:rPr sz="1300" b="0" i="0">
-                <a:solidFill>
-                  <a:srgbClr val="5A6A72"/>
+              <a:rPr sz="1200" b="0" i="0">
+                <a:solidFill>
+                  <a:srgbClr val="17242E"/>
                 </a:solidFill>
                 <a:latin typeface="Georgia"/>
               </a:rPr>
-              <a:t>Not my memory — </a:t>
-            </a:r>
-            <a:r>
-              <a:rPr sz="1300" b="1" i="1">
-                <a:solidFill>
-                  <a:srgbClr val="17242E"/>
+              <a:t>Your library stays on your device. But when you ask, the relevant passage is sent to the AI model to draft the answer — so it leaves the device for that request. </a:t>
+            </a:r>
+            <a:r>
+              <a:rPr sz="1200" b="1" i="0">
+                <a:solidFill>
+                  <a:srgbClr val="2F8F83"/>
                 </a:solidFill>
                 <a:latin typeface="Georgia"/>
               </a:rPr>
-              <a:t>yours</a:t>
-            </a:r>
-            <a:r>
-              <a:rPr sz="1300" b="0" i="0">
-                <a:solidFill>
-                  <a:srgbClr val="5A6A72"/>
-                </a:solidFill>
-                <a:latin typeface="Georgia"/>
-              </a:rPr>
-              <a:t>. The sources you chose and trust, filed in one chart I've read cover to cover.</a:t>
-            </a:r>
-          </a:p>
-        </p:txBody>
-      </p:sp>
-      <p:sp>
-        <p:nvSpPr>
-          <p:cNvPr id="16" name="Rounded Rectangle 15"/>
+              <a:t>De-identify before entering PHI.</a:t>
+            </a:r>
+          </a:p>
+        </p:txBody>
+      </p:sp>
+      <p:sp>
+        <p:nvSpPr>
+          <p:cNvPr id="19" name="Rounded Rectangle 18"/>
           <p:cNvSpPr/>
           <p:nvPr/>
         </p:nvSpPr>
         <p:spPr>
           <a:xfrm>
-            <a:off x="2011680" y="2468880"/>
-            <a:ext cx="6949440" cy="2468880"/>
+            <a:off x="6217920" y="2331720"/>
+            <a:ext cx="5120640" cy="2148840"/>
           </a:xfrm>
           <a:prstGeom prst="roundRect">
             <a:avLst>
-              <a:gd name="adj" fmla="val 3000"/>
+              <a:gd name="adj" fmla="val 5000"/>
             </a:avLst>
           </a:prstGeom>
           <a:solidFill>
             <a:srgbClr val="FFFFFF"/>
           </a:solidFill>
-          <a:ln w="25400">
+          <a:ln w="19050">
             <a:solidFill>
-              <a:srgbClr val="1F5C6B"/>
+              <a:srgbClr val="B5822E"/>
             </a:solidFill>
           </a:ln>
           <a:effectLst/>
@@ -6567,23 +6685,117 @@
       </p:sp>
       <p:sp>
         <p:nvSpPr>
-          <p:cNvPr id="17" name="Rectangle 16"/>
+          <p:cNvPr id="20" name="TextBox 19"/>
+          <p:cNvSpPr txBox="1"/>
+          <p:nvPr/>
+        </p:nvSpPr>
+        <p:spPr>
+          <a:xfrm>
+            <a:off x="6492240" y="2542032"/>
+            <a:ext cx="4572000" cy="320040"/>
+          </a:xfrm>
+          <a:prstGeom prst="rect">
+            <a:avLst/>
+          </a:prstGeom>
+          <a:noFill/>
+        </p:spPr>
+        <p:txBody>
+          <a:bodyPr wrap="square" anchor="t" lIns="0" rIns="0" tIns="0" bIns="0">
+            <a:spAutoFit/>
+          </a:bodyPr>
+          <a:lstStyle/>
+          <a:p>
+            <a:pPr algn="l">
+              <a:spcAft>
+                <a:spcPts val="0"/>
+              </a:spcAft>
+            </a:pPr>
+            <a:r>
+              <a:rPr sz="1100" b="1" i="0">
+                <a:solidFill>
+                  <a:srgbClr val="B5822E"/>
+                </a:solidFill>
+                <a:latin typeface="Consolas"/>
+              </a:rPr>
+              <a:t>PAID · PRIVATE HOSTED</a:t>
+            </a:r>
+          </a:p>
+        </p:txBody>
+      </p:sp>
+      <p:sp>
+        <p:nvSpPr>
+          <p:cNvPr id="21" name="TextBox 20"/>
+          <p:cNvSpPr txBox="1"/>
+          <p:nvPr/>
+        </p:nvSpPr>
+        <p:spPr>
+          <a:xfrm>
+            <a:off x="6492240" y="2926080"/>
+            <a:ext cx="4617720" cy="1463040"/>
+          </a:xfrm>
+          <a:prstGeom prst="rect">
+            <a:avLst/>
+          </a:prstGeom>
+          <a:noFill/>
+        </p:spPr>
+        <p:txBody>
+          <a:bodyPr wrap="square" anchor="t" lIns="0" rIns="0" tIns="0" bIns="0">
+            <a:spAutoFit/>
+          </a:bodyPr>
+          <a:lstStyle/>
+          <a:p>
+            <a:pPr algn="l">
+              <a:lnSpc>
+                <a:spcPct val="110000"/>
+              </a:lnSpc>
+              <a:spcAft>
+                <a:spcPts val="0"/>
+              </a:spcAft>
+            </a:pPr>
+            <a:r>
+              <a:rPr sz="1200" b="0" i="0">
+                <a:solidFill>
+                  <a:srgbClr val="17242E"/>
+                </a:solidFill>
+                <a:latin typeface="Georgia"/>
+              </a:rPr>
+              <a:t>Content lives on our servers — encrypted at rest, access-controlled, but not zero-knowledge. </a:t>
+            </a:r>
+            <a:r>
+              <a:rPr sz="1200" b="1" i="0">
+                <a:solidFill>
+                  <a:srgbClr val="B5822E"/>
+                </a:solidFill>
+                <a:latin typeface="Georgia"/>
+              </a:rPr>
+              <a:t>A signed BAA is required before entering PHI. No BAA yet → don't enter identifiable patient data.</a:t>
+            </a:r>
+          </a:p>
+        </p:txBody>
+      </p:sp>
+      <p:sp>
+        <p:nvSpPr>
+          <p:cNvPr id="22" name="Rounded Rectangle 21"/>
           <p:cNvSpPr/>
           <p:nvPr/>
         </p:nvSpPr>
         <p:spPr>
           <a:xfrm>
-            <a:off x="2011680" y="2468880"/>
-            <a:ext cx="6949440" cy="457200"/>
-          </a:xfrm>
-          <a:prstGeom prst="rect">
-            <a:avLst/>
+            <a:off x="822960" y="4663440"/>
+            <a:ext cx="10515600" cy="658368"/>
+          </a:xfrm>
+          <a:prstGeom prst="roundRect">
+            <a:avLst>
+              <a:gd name="adj" fmla="val 20000"/>
+            </a:avLst>
           </a:prstGeom>
           <a:solidFill>
             <a:srgbClr val="E4F0F1"/>
           </a:solidFill>
-          <a:ln>
-            <a:noFill/>
+          <a:ln w="12700">
+            <a:solidFill>
+              <a:srgbClr val="BEDDDF"/>
+            </a:solidFill>
           </a:ln>
           <a:effectLst/>
         </p:spPr>
@@ -6611,14 +6823,14 @@
       </p:sp>
       <p:sp>
         <p:nvSpPr>
-          <p:cNvPr id="18" name="TextBox 17"/>
+          <p:cNvPr id="23" name="TextBox 22"/>
           <p:cNvSpPr txBox="1"/>
           <p:nvPr/>
         </p:nvSpPr>
         <p:spPr>
           <a:xfrm>
-            <a:off x="2286000" y="2468880"/>
-            <a:ext cx="6400800" cy="457200"/>
+            <a:off x="1143000" y="4663440"/>
+            <a:ext cx="9875520" cy="658368"/>
           </a:xfrm>
           <a:prstGeom prst="rect">
             <a:avLst/>
@@ -6637,892 +6849,22 @@
               </a:spcAft>
             </a:pPr>
             <a:r>
-              <a:rPr sz="1100" b="1" i="0">
+              <a:rPr sz="1300" b="1" i="0">
                 <a:solidFill>
                   <a:srgbClr val="1F5C6B"/>
                 </a:solidFill>
                 <a:latin typeface="Consolas"/>
               </a:rPr>
-              <a:t>CHART — YOUR PRACTICE</a:t>
-            </a:r>
-          </a:p>
-        </p:txBody>
-      </p:sp>
-      <p:sp>
-        <p:nvSpPr>
-          <p:cNvPr id="19" name="Rounded Rectangle 18"/>
-          <p:cNvSpPr/>
-          <p:nvPr/>
-        </p:nvSpPr>
-        <p:spPr>
-          <a:xfrm>
-            <a:off x="8915400" y="3026664"/>
-            <a:ext cx="1737360" cy="256032"/>
-          </a:xfrm>
-          <a:prstGeom prst="roundRect">
-            <a:avLst>
-              <a:gd name="adj" fmla="val 20000"/>
-            </a:avLst>
-          </a:prstGeom>
-          <a:solidFill>
-            <a:srgbClr val="1F5C6B"/>
-          </a:solidFill>
-          <a:ln>
-            <a:noFill/>
-          </a:ln>
-          <a:effectLst/>
-        </p:spPr>
-        <p:style>
-          <a:lnRef idx="1">
-            <a:schemeClr val="accent1"/>
-          </a:lnRef>
-          <a:fillRef idx="3">
-            <a:schemeClr val="accent1"/>
-          </a:fillRef>
-          <a:effectRef idx="2">
-            <a:schemeClr val="accent1"/>
-          </a:effectRef>
-          <a:fontRef idx="minor">
-            <a:schemeClr val="lt1"/>
-          </a:fontRef>
-        </p:style>
-        <p:txBody>
-          <a:bodyPr rtlCol="0" anchor="ctr"/>
-          <a:lstStyle/>
-          <a:p>
-            <a:pPr algn="ctr"/>
-          </a:p>
-        </p:txBody>
-      </p:sp>
-      <p:sp>
-        <p:nvSpPr>
-          <p:cNvPr id="20" name="TextBox 19"/>
-          <p:cNvSpPr txBox="1"/>
-          <p:nvPr/>
-        </p:nvSpPr>
-        <p:spPr>
-          <a:xfrm>
-            <a:off x="9070848" y="3026664"/>
-            <a:ext cx="1554480" cy="256032"/>
-          </a:xfrm>
-          <a:prstGeom prst="rect">
-            <a:avLst/>
-          </a:prstGeom>
-          <a:noFill/>
-        </p:spPr>
-        <p:txBody>
-          <a:bodyPr wrap="square" anchor="ctr" lIns="0" rIns="0" tIns="0" bIns="0">
-            <a:spAutoFit/>
-          </a:bodyPr>
-          <a:lstStyle/>
-          <a:p>
-            <a:pPr algn="l">
-              <a:spcAft>
-                <a:spcPts val="0"/>
-              </a:spcAft>
-            </a:pPr>
-            <a:r>
-              <a:rPr sz="1100" b="1" i="0">
-                <a:solidFill>
-                  <a:srgbClr val="FFFFFF"/>
-                </a:solidFill>
-                <a:latin typeface="Calibri"/>
-              </a:rPr>
-              <a:t>Guidelines</a:t>
-            </a:r>
-          </a:p>
-        </p:txBody>
-      </p:sp>
-      <p:sp>
-        <p:nvSpPr>
-          <p:cNvPr id="21" name="Rectangle 20"/>
-          <p:cNvSpPr/>
-          <p:nvPr/>
-        </p:nvSpPr>
-        <p:spPr>
-          <a:xfrm>
-            <a:off x="2286000" y="3328416"/>
-            <a:ext cx="6400800" cy="13716"/>
-          </a:xfrm>
-          <a:prstGeom prst="rect">
-            <a:avLst/>
-          </a:prstGeom>
-          <a:solidFill>
-            <a:srgbClr val="D9E0DE"/>
-          </a:solidFill>
-          <a:ln>
-            <a:noFill/>
-          </a:ln>
-          <a:effectLst/>
-        </p:spPr>
-        <p:style>
-          <a:lnRef idx="1">
-            <a:schemeClr val="accent1"/>
-          </a:lnRef>
-          <a:fillRef idx="3">
-            <a:schemeClr val="accent1"/>
-          </a:fillRef>
-          <a:effectRef idx="2">
-            <a:schemeClr val="accent1"/>
-          </a:effectRef>
-          <a:fontRef idx="minor">
-            <a:schemeClr val="lt1"/>
-          </a:fontRef>
-        </p:style>
-        <p:txBody>
-          <a:bodyPr rtlCol="0" anchor="ctr"/>
-          <a:lstStyle/>
-          <a:p>
-            <a:pPr algn="ctr"/>
-          </a:p>
-        </p:txBody>
-      </p:sp>
-      <p:sp>
-        <p:nvSpPr>
-          <p:cNvPr id="22" name="TextBox 21"/>
-          <p:cNvSpPr txBox="1"/>
-          <p:nvPr/>
-        </p:nvSpPr>
-        <p:spPr>
-          <a:xfrm>
-            <a:off x="2331720" y="2971800"/>
-            <a:ext cx="6309359" cy="384048"/>
-          </a:xfrm>
-          <a:prstGeom prst="rect">
-            <a:avLst/>
-          </a:prstGeom>
-          <a:noFill/>
-        </p:spPr>
-        <p:txBody>
-          <a:bodyPr wrap="square" anchor="ctr" lIns="0" rIns="0" tIns="0" bIns="0">
-            <a:spAutoFit/>
-          </a:bodyPr>
-          <a:lstStyle/>
-          <a:p>
-            <a:pPr algn="l">
-              <a:spcAft>
-                <a:spcPts val="0"/>
-              </a:spcAft>
-            </a:pPr>
-            <a:r>
-              <a:rPr sz="1200" b="0" i="0">
+              <a:t>We'd rather tell you this up front </a:t>
+            </a:r>
+            <a:r>
+              <a:rPr sz="1250" b="0" i="0">
                 <a:solidFill>
                   <a:srgbClr val="17242E"/>
                 </a:solidFill>
                 <a:latin typeface="Georgia"/>
               </a:rPr>
-              <a:t>Guidelines</a:t>
-            </a:r>
-          </a:p>
-        </p:txBody>
-      </p:sp>
-      <p:sp>
-        <p:nvSpPr>
-          <p:cNvPr id="23" name="Rounded Rectangle 22"/>
-          <p:cNvSpPr/>
-          <p:nvPr/>
-        </p:nvSpPr>
-        <p:spPr>
-          <a:xfrm>
-            <a:off x="8915400" y="3410712"/>
-            <a:ext cx="1737360" cy="256032"/>
-          </a:xfrm>
-          <a:prstGeom prst="roundRect">
-            <a:avLst>
-              <a:gd name="adj" fmla="val 20000"/>
-            </a:avLst>
-          </a:prstGeom>
-          <a:solidFill>
-            <a:srgbClr val="2F8F83"/>
-          </a:solidFill>
-          <a:ln>
-            <a:noFill/>
-          </a:ln>
-          <a:effectLst/>
-        </p:spPr>
-        <p:style>
-          <a:lnRef idx="1">
-            <a:schemeClr val="accent1"/>
-          </a:lnRef>
-          <a:fillRef idx="3">
-            <a:schemeClr val="accent1"/>
-          </a:fillRef>
-          <a:effectRef idx="2">
-            <a:schemeClr val="accent1"/>
-          </a:effectRef>
-          <a:fontRef idx="minor">
-            <a:schemeClr val="lt1"/>
-          </a:fontRef>
-        </p:style>
-        <p:txBody>
-          <a:bodyPr rtlCol="0" anchor="ctr"/>
-          <a:lstStyle/>
-          <a:p>
-            <a:pPr algn="ctr"/>
-          </a:p>
-        </p:txBody>
-      </p:sp>
-      <p:sp>
-        <p:nvSpPr>
-          <p:cNvPr id="24" name="TextBox 23"/>
-          <p:cNvSpPr txBox="1"/>
-          <p:nvPr/>
-        </p:nvSpPr>
-        <p:spPr>
-          <a:xfrm>
-            <a:off x="9070848" y="3410712"/>
-            <a:ext cx="1554480" cy="256032"/>
-          </a:xfrm>
-          <a:prstGeom prst="rect">
-            <a:avLst/>
-          </a:prstGeom>
-          <a:noFill/>
-        </p:spPr>
-        <p:txBody>
-          <a:bodyPr wrap="square" anchor="ctr" lIns="0" rIns="0" tIns="0" bIns="0">
-            <a:spAutoFit/>
-          </a:bodyPr>
-          <a:lstStyle/>
-          <a:p>
-            <a:pPr algn="l">
-              <a:spcAft>
-                <a:spcPts val="0"/>
-              </a:spcAft>
-            </a:pPr>
-            <a:r>
-              <a:rPr sz="1100" b="1" i="0">
-                <a:solidFill>
-                  <a:srgbClr val="FFFFFF"/>
-                </a:solidFill>
-                <a:latin typeface="Calibri"/>
-              </a:rPr>
-              <a:t>Journal papers</a:t>
-            </a:r>
-          </a:p>
-        </p:txBody>
-      </p:sp>
-      <p:sp>
-        <p:nvSpPr>
-          <p:cNvPr id="25" name="Rectangle 24"/>
-          <p:cNvSpPr/>
-          <p:nvPr/>
-        </p:nvSpPr>
-        <p:spPr>
-          <a:xfrm>
-            <a:off x="2286000" y="3712463"/>
-            <a:ext cx="6400800" cy="13716"/>
-          </a:xfrm>
-          <a:prstGeom prst="rect">
-            <a:avLst/>
-          </a:prstGeom>
-          <a:solidFill>
-            <a:srgbClr val="D9E0DE"/>
-          </a:solidFill>
-          <a:ln>
-            <a:noFill/>
-          </a:ln>
-          <a:effectLst/>
-        </p:spPr>
-        <p:style>
-          <a:lnRef idx="1">
-            <a:schemeClr val="accent1"/>
-          </a:lnRef>
-          <a:fillRef idx="3">
-            <a:schemeClr val="accent1"/>
-          </a:fillRef>
-          <a:effectRef idx="2">
-            <a:schemeClr val="accent1"/>
-          </a:effectRef>
-          <a:fontRef idx="minor">
-            <a:schemeClr val="lt1"/>
-          </a:fontRef>
-        </p:style>
-        <p:txBody>
-          <a:bodyPr rtlCol="0" anchor="ctr"/>
-          <a:lstStyle/>
-          <a:p>
-            <a:pPr algn="ctr"/>
-          </a:p>
-        </p:txBody>
-      </p:sp>
-      <p:sp>
-        <p:nvSpPr>
-          <p:cNvPr id="26" name="TextBox 25"/>
-          <p:cNvSpPr txBox="1"/>
-          <p:nvPr/>
-        </p:nvSpPr>
-        <p:spPr>
-          <a:xfrm>
-            <a:off x="2331720" y="3355848"/>
-            <a:ext cx="6309359" cy="384048"/>
-          </a:xfrm>
-          <a:prstGeom prst="rect">
-            <a:avLst/>
-          </a:prstGeom>
-          <a:noFill/>
-        </p:spPr>
-        <p:txBody>
-          <a:bodyPr wrap="square" anchor="ctr" lIns="0" rIns="0" tIns="0" bIns="0">
-            <a:spAutoFit/>
-          </a:bodyPr>
-          <a:lstStyle/>
-          <a:p>
-            <a:pPr algn="l">
-              <a:spcAft>
-                <a:spcPts val="0"/>
-              </a:spcAft>
-            </a:pPr>
-            <a:r>
-              <a:rPr sz="1200" b="0" i="0">
-                <a:solidFill>
-                  <a:srgbClr val="17242E"/>
-                </a:solidFill>
-                <a:latin typeface="Georgia"/>
-              </a:rPr>
-              <a:t>Journal papers</a:t>
-            </a:r>
-          </a:p>
-        </p:txBody>
-      </p:sp>
-      <p:sp>
-        <p:nvSpPr>
-          <p:cNvPr id="27" name="Rounded Rectangle 26"/>
-          <p:cNvSpPr/>
-          <p:nvPr/>
-        </p:nvSpPr>
-        <p:spPr>
-          <a:xfrm>
-            <a:off x="8915400" y="3794759"/>
-            <a:ext cx="1737360" cy="256032"/>
-          </a:xfrm>
-          <a:prstGeom prst="roundRect">
-            <a:avLst>
-              <a:gd name="adj" fmla="val 20000"/>
-            </a:avLst>
-          </a:prstGeom>
-          <a:solidFill>
-            <a:srgbClr val="3A6EA5"/>
-          </a:solidFill>
-          <a:ln>
-            <a:noFill/>
-          </a:ln>
-          <a:effectLst/>
-        </p:spPr>
-        <p:style>
-          <a:lnRef idx="1">
-            <a:schemeClr val="accent1"/>
-          </a:lnRef>
-          <a:fillRef idx="3">
-            <a:schemeClr val="accent1"/>
-          </a:fillRef>
-          <a:effectRef idx="2">
-            <a:schemeClr val="accent1"/>
-          </a:effectRef>
-          <a:fontRef idx="minor">
-            <a:schemeClr val="lt1"/>
-          </a:fontRef>
-        </p:style>
-        <p:txBody>
-          <a:bodyPr rtlCol="0" anchor="ctr"/>
-          <a:lstStyle/>
-          <a:p>
-            <a:pPr algn="ctr"/>
-          </a:p>
-        </p:txBody>
-      </p:sp>
-      <p:sp>
-        <p:nvSpPr>
-          <p:cNvPr id="28" name="TextBox 27"/>
-          <p:cNvSpPr txBox="1"/>
-          <p:nvPr/>
-        </p:nvSpPr>
-        <p:spPr>
-          <a:xfrm>
-            <a:off x="9070848" y="3794759"/>
-            <a:ext cx="1554480" cy="256032"/>
-          </a:xfrm>
-          <a:prstGeom prst="rect">
-            <a:avLst/>
-          </a:prstGeom>
-          <a:noFill/>
-        </p:spPr>
-        <p:txBody>
-          <a:bodyPr wrap="square" anchor="ctr" lIns="0" rIns="0" tIns="0" bIns="0">
-            <a:spAutoFit/>
-          </a:bodyPr>
-          <a:lstStyle/>
-          <a:p>
-            <a:pPr algn="l">
-              <a:spcAft>
-                <a:spcPts val="0"/>
-              </a:spcAft>
-            </a:pPr>
-            <a:r>
-              <a:rPr sz="1100" b="1" i="0">
-                <a:solidFill>
-                  <a:srgbClr val="FFFFFF"/>
-                </a:solidFill>
-                <a:latin typeface="Calibri"/>
-              </a:rPr>
-              <a:t>Drug reference</a:t>
-            </a:r>
-          </a:p>
-        </p:txBody>
-      </p:sp>
-      <p:sp>
-        <p:nvSpPr>
-          <p:cNvPr id="29" name="Rectangle 28"/>
-          <p:cNvSpPr/>
-          <p:nvPr/>
-        </p:nvSpPr>
-        <p:spPr>
-          <a:xfrm>
-            <a:off x="2286000" y="4096511"/>
-            <a:ext cx="6400800" cy="13716"/>
-          </a:xfrm>
-          <a:prstGeom prst="rect">
-            <a:avLst/>
-          </a:prstGeom>
-          <a:solidFill>
-            <a:srgbClr val="D9E0DE"/>
-          </a:solidFill>
-          <a:ln>
-            <a:noFill/>
-          </a:ln>
-          <a:effectLst/>
-        </p:spPr>
-        <p:style>
-          <a:lnRef idx="1">
-            <a:schemeClr val="accent1"/>
-          </a:lnRef>
-          <a:fillRef idx="3">
-            <a:schemeClr val="accent1"/>
-          </a:fillRef>
-          <a:effectRef idx="2">
-            <a:schemeClr val="accent1"/>
-          </a:effectRef>
-          <a:fontRef idx="minor">
-            <a:schemeClr val="lt1"/>
-          </a:fontRef>
-        </p:style>
-        <p:txBody>
-          <a:bodyPr rtlCol="0" anchor="ctr"/>
-          <a:lstStyle/>
-          <a:p>
-            <a:pPr algn="ctr"/>
-          </a:p>
-        </p:txBody>
-      </p:sp>
-      <p:sp>
-        <p:nvSpPr>
-          <p:cNvPr id="30" name="TextBox 29"/>
-          <p:cNvSpPr txBox="1"/>
-          <p:nvPr/>
-        </p:nvSpPr>
-        <p:spPr>
-          <a:xfrm>
-            <a:off x="2331720" y="3739896"/>
-            <a:ext cx="6309359" cy="384048"/>
-          </a:xfrm>
-          <a:prstGeom prst="rect">
-            <a:avLst/>
-          </a:prstGeom>
-          <a:noFill/>
-        </p:spPr>
-        <p:txBody>
-          <a:bodyPr wrap="square" anchor="ctr" lIns="0" rIns="0" tIns="0" bIns="0">
-            <a:spAutoFit/>
-          </a:bodyPr>
-          <a:lstStyle/>
-          <a:p>
-            <a:pPr algn="l">
-              <a:spcAft>
-                <a:spcPts val="0"/>
-              </a:spcAft>
-            </a:pPr>
-            <a:r>
-              <a:rPr sz="1200" b="0" i="0">
-                <a:solidFill>
-                  <a:srgbClr val="17242E"/>
-                </a:solidFill>
-                <a:latin typeface="Georgia"/>
-              </a:rPr>
-              <a:t>Drug reference</a:t>
-            </a:r>
-          </a:p>
-        </p:txBody>
-      </p:sp>
-      <p:sp>
-        <p:nvSpPr>
-          <p:cNvPr id="31" name="Rounded Rectangle 30"/>
-          <p:cNvSpPr/>
-          <p:nvPr/>
-        </p:nvSpPr>
-        <p:spPr>
-          <a:xfrm>
-            <a:off x="8915400" y="4178807"/>
-            <a:ext cx="1737360" cy="256032"/>
-          </a:xfrm>
-          <a:prstGeom prst="roundRect">
-            <a:avLst>
-              <a:gd name="adj" fmla="val 20000"/>
-            </a:avLst>
-          </a:prstGeom>
-          <a:solidFill>
-            <a:srgbClr val="B5822E"/>
-          </a:solidFill>
-          <a:ln>
-            <a:noFill/>
-          </a:ln>
-          <a:effectLst/>
-        </p:spPr>
-        <p:style>
-          <a:lnRef idx="1">
-            <a:schemeClr val="accent1"/>
-          </a:lnRef>
-          <a:fillRef idx="3">
-            <a:schemeClr val="accent1"/>
-          </a:fillRef>
-          <a:effectRef idx="2">
-            <a:schemeClr val="accent1"/>
-          </a:effectRef>
-          <a:fontRef idx="minor">
-            <a:schemeClr val="lt1"/>
-          </a:fontRef>
-        </p:style>
-        <p:txBody>
-          <a:bodyPr rtlCol="0" anchor="ctr"/>
-          <a:lstStyle/>
-          <a:p>
-            <a:pPr algn="ctr"/>
-          </a:p>
-        </p:txBody>
-      </p:sp>
-      <p:sp>
-        <p:nvSpPr>
-          <p:cNvPr id="32" name="TextBox 31"/>
-          <p:cNvSpPr txBox="1"/>
-          <p:nvPr/>
-        </p:nvSpPr>
-        <p:spPr>
-          <a:xfrm>
-            <a:off x="9070848" y="4178807"/>
-            <a:ext cx="1554480" cy="256032"/>
-          </a:xfrm>
-          <a:prstGeom prst="rect">
-            <a:avLst/>
-          </a:prstGeom>
-          <a:noFill/>
-        </p:spPr>
-        <p:txBody>
-          <a:bodyPr wrap="square" anchor="ctr" lIns="0" rIns="0" tIns="0" bIns="0">
-            <a:spAutoFit/>
-          </a:bodyPr>
-          <a:lstStyle/>
-          <a:p>
-            <a:pPr algn="l">
-              <a:spcAft>
-                <a:spcPts val="0"/>
-              </a:spcAft>
-            </a:pPr>
-            <a:r>
-              <a:rPr sz="1100" b="1" i="0">
-                <a:solidFill>
-                  <a:srgbClr val="FFFFFF"/>
-                </a:solidFill>
-                <a:latin typeface="Calibri"/>
-              </a:rPr>
-              <a:t>Case notes</a:t>
-            </a:r>
-          </a:p>
-        </p:txBody>
-      </p:sp>
-      <p:sp>
-        <p:nvSpPr>
-          <p:cNvPr id="33" name="Rectangle 32"/>
-          <p:cNvSpPr/>
-          <p:nvPr/>
-        </p:nvSpPr>
-        <p:spPr>
-          <a:xfrm>
-            <a:off x="2286000" y="4480559"/>
-            <a:ext cx="6400800" cy="13716"/>
-          </a:xfrm>
-          <a:prstGeom prst="rect">
-            <a:avLst/>
-          </a:prstGeom>
-          <a:solidFill>
-            <a:srgbClr val="D9E0DE"/>
-          </a:solidFill>
-          <a:ln>
-            <a:noFill/>
-          </a:ln>
-          <a:effectLst/>
-        </p:spPr>
-        <p:style>
-          <a:lnRef idx="1">
-            <a:schemeClr val="accent1"/>
-          </a:lnRef>
-          <a:fillRef idx="3">
-            <a:schemeClr val="accent1"/>
-          </a:fillRef>
-          <a:effectRef idx="2">
-            <a:schemeClr val="accent1"/>
-          </a:effectRef>
-          <a:fontRef idx="minor">
-            <a:schemeClr val="lt1"/>
-          </a:fontRef>
-        </p:style>
-        <p:txBody>
-          <a:bodyPr rtlCol="0" anchor="ctr"/>
-          <a:lstStyle/>
-          <a:p>
-            <a:pPr algn="ctr"/>
-          </a:p>
-        </p:txBody>
-      </p:sp>
-      <p:sp>
-        <p:nvSpPr>
-          <p:cNvPr id="34" name="TextBox 33"/>
-          <p:cNvSpPr txBox="1"/>
-          <p:nvPr/>
-        </p:nvSpPr>
-        <p:spPr>
-          <a:xfrm>
-            <a:off x="2331720" y="4123944"/>
-            <a:ext cx="6309359" cy="384048"/>
-          </a:xfrm>
-          <a:prstGeom prst="rect">
-            <a:avLst/>
-          </a:prstGeom>
-          <a:noFill/>
-        </p:spPr>
-        <p:txBody>
-          <a:bodyPr wrap="square" anchor="ctr" lIns="0" rIns="0" tIns="0" bIns="0">
-            <a:spAutoFit/>
-          </a:bodyPr>
-          <a:lstStyle/>
-          <a:p>
-            <a:pPr algn="l">
-              <a:spcAft>
-                <a:spcPts val="0"/>
-              </a:spcAft>
-            </a:pPr>
-            <a:r>
-              <a:rPr sz="1200" b="0" i="0">
-                <a:solidFill>
-                  <a:srgbClr val="17242E"/>
-                </a:solidFill>
-                <a:latin typeface="Georgia"/>
-              </a:rPr>
-              <a:t>Case notes</a:t>
-            </a:r>
-          </a:p>
-        </p:txBody>
-      </p:sp>
-      <p:sp>
-        <p:nvSpPr>
-          <p:cNvPr id="35" name="Rounded Rectangle 34"/>
-          <p:cNvSpPr/>
-          <p:nvPr/>
-        </p:nvSpPr>
-        <p:spPr>
-          <a:xfrm>
-            <a:off x="8915400" y="4562855"/>
-            <a:ext cx="1737360" cy="256032"/>
-          </a:xfrm>
-          <a:prstGeom prst="roundRect">
-            <a:avLst>
-              <a:gd name="adj" fmla="val 20000"/>
-            </a:avLst>
-          </a:prstGeom>
-          <a:solidFill>
-            <a:srgbClr val="6B4E8E"/>
-          </a:solidFill>
-          <a:ln>
-            <a:noFill/>
-          </a:ln>
-          <a:effectLst/>
-        </p:spPr>
-        <p:style>
-          <a:lnRef idx="1">
-            <a:schemeClr val="accent1"/>
-          </a:lnRef>
-          <a:fillRef idx="3">
-            <a:schemeClr val="accent1"/>
-          </a:fillRef>
-          <a:effectRef idx="2">
-            <a:schemeClr val="accent1"/>
-          </a:effectRef>
-          <a:fontRef idx="minor">
-            <a:schemeClr val="lt1"/>
-          </a:fontRef>
-        </p:style>
-        <p:txBody>
-          <a:bodyPr rtlCol="0" anchor="ctr"/>
-          <a:lstStyle/>
-          <a:p>
-            <a:pPr algn="ctr"/>
-          </a:p>
-        </p:txBody>
-      </p:sp>
-      <p:sp>
-        <p:nvSpPr>
-          <p:cNvPr id="36" name="TextBox 35"/>
-          <p:cNvSpPr txBox="1"/>
-          <p:nvPr/>
-        </p:nvSpPr>
-        <p:spPr>
-          <a:xfrm>
-            <a:off x="9070848" y="4562855"/>
-            <a:ext cx="1554480" cy="256032"/>
-          </a:xfrm>
-          <a:prstGeom prst="rect">
-            <a:avLst/>
-          </a:prstGeom>
-          <a:noFill/>
-        </p:spPr>
-        <p:txBody>
-          <a:bodyPr wrap="square" anchor="ctr" lIns="0" rIns="0" tIns="0" bIns="0">
-            <a:spAutoFit/>
-          </a:bodyPr>
-          <a:lstStyle/>
-          <a:p>
-            <a:pPr algn="l">
-              <a:spcAft>
-                <a:spcPts val="0"/>
-              </a:spcAft>
-            </a:pPr>
-            <a:r>
-              <a:rPr sz="1100" b="1" i="0">
-                <a:solidFill>
-                  <a:srgbClr val="FFFFFF"/>
-                </a:solidFill>
-                <a:latin typeface="Calibri"/>
-              </a:rPr>
-              <a:t>Society updates</a:t>
-            </a:r>
-          </a:p>
-        </p:txBody>
-      </p:sp>
-      <p:sp>
-        <p:nvSpPr>
-          <p:cNvPr id="37" name="Rectangle 36"/>
-          <p:cNvSpPr/>
-          <p:nvPr/>
-        </p:nvSpPr>
-        <p:spPr>
-          <a:xfrm>
-            <a:off x="2286000" y="4864607"/>
-            <a:ext cx="6400800" cy="13716"/>
-          </a:xfrm>
-          <a:prstGeom prst="rect">
-            <a:avLst/>
-          </a:prstGeom>
-          <a:solidFill>
-            <a:srgbClr val="D9E0DE"/>
-          </a:solidFill>
-          <a:ln>
-            <a:noFill/>
-          </a:ln>
-          <a:effectLst/>
-        </p:spPr>
-        <p:style>
-          <a:lnRef idx="1">
-            <a:schemeClr val="accent1"/>
-          </a:lnRef>
-          <a:fillRef idx="3">
-            <a:schemeClr val="accent1"/>
-          </a:fillRef>
-          <a:effectRef idx="2">
-            <a:schemeClr val="accent1"/>
-          </a:effectRef>
-          <a:fontRef idx="minor">
-            <a:schemeClr val="lt1"/>
-          </a:fontRef>
-        </p:style>
-        <p:txBody>
-          <a:bodyPr rtlCol="0" anchor="ctr"/>
-          <a:lstStyle/>
-          <a:p>
-            <a:pPr algn="ctr"/>
-          </a:p>
-        </p:txBody>
-      </p:sp>
-      <p:sp>
-        <p:nvSpPr>
-          <p:cNvPr id="38" name="TextBox 37"/>
-          <p:cNvSpPr txBox="1"/>
-          <p:nvPr/>
-        </p:nvSpPr>
-        <p:spPr>
-          <a:xfrm>
-            <a:off x="2331720" y="4507992"/>
-            <a:ext cx="6309359" cy="384048"/>
-          </a:xfrm>
-          <a:prstGeom prst="rect">
-            <a:avLst/>
-          </a:prstGeom>
-          <a:noFill/>
-        </p:spPr>
-        <p:txBody>
-          <a:bodyPr wrap="square" anchor="ctr" lIns="0" rIns="0" tIns="0" bIns="0">
-            <a:spAutoFit/>
-          </a:bodyPr>
-          <a:lstStyle/>
-          <a:p>
-            <a:pPr algn="l">
-              <a:spcAft>
-                <a:spcPts val="0"/>
-              </a:spcAft>
-            </a:pPr>
-            <a:r>
-              <a:rPr sz="1200" b="0" i="0">
-                <a:solidFill>
-                  <a:srgbClr val="17242E"/>
-                </a:solidFill>
-                <a:latin typeface="Georgia"/>
-              </a:rPr>
-              <a:t>Society updates</a:t>
-            </a:r>
-          </a:p>
-        </p:txBody>
-      </p:sp>
-      <p:sp>
-        <p:nvSpPr>
-          <p:cNvPr id="39" name="TextBox 38"/>
-          <p:cNvSpPr txBox="1"/>
-          <p:nvPr/>
-        </p:nvSpPr>
-        <p:spPr>
-          <a:xfrm>
-            <a:off x="822960" y="5257800"/>
-            <a:ext cx="10424160" cy="365760"/>
-          </a:xfrm>
-          <a:prstGeom prst="rect">
-            <a:avLst/>
-          </a:prstGeom>
-          <a:noFill/>
-        </p:spPr>
-        <p:txBody>
-          <a:bodyPr wrap="square" anchor="t" lIns="0" rIns="0" tIns="0" bIns="0">
-            <a:spAutoFit/>
-          </a:bodyPr>
-          <a:lstStyle/>
-          <a:p>
-            <a:pPr algn="ctr">
-              <a:spcAft>
-                <a:spcPts val="0"/>
-              </a:spcAft>
-            </a:pPr>
-            <a:r>
-              <a:rPr sz="1250" b="0" i="1">
-                <a:solidFill>
-                  <a:srgbClr val="5A6A72"/>
-                </a:solidFill>
-                <a:latin typeface="Georgia"/>
-              </a:rPr>
-              <a:t>Every tab here, you filed. That's the point — I work from your chart, not the web's.</a:t>
+              <a:t>than have you find out in an audit. Source transparency + your review — you stay the decider.</a:t>
             </a:r>
           </a:p>
         </p:txBody>
@@ -7750,7 +7092,7 @@
                 </a:solidFill>
                 <a:latin typeface="Consolas"/>
               </a:rPr>
-              <a:t>SECTION 04 — HOW I WORK</a:t>
+              <a:t>SECTION 03 — YOUR KNOWLEDGE LIBRARY</a:t>
             </a:r>
           </a:p>
         </p:txBody>
@@ -8016,7 +7358,7 @@
         <p:spPr>
           <a:xfrm>
             <a:off x="822960" y="960120"/>
-            <a:ext cx="10607040" cy="822960"/>
+            <a:ext cx="10607040" cy="548640"/>
           </a:xfrm>
           <a:prstGeom prst="rect">
             <a:avLst/>
@@ -8030,21 +7372,18 @@
           <a:lstStyle/>
           <a:p>
             <a:pPr algn="l">
-              <a:lnSpc>
-                <a:spcPct val="100000"/>
-              </a:lnSpc>
               <a:spcAft>
                 <a:spcPts val="0"/>
               </a:spcAft>
             </a:pPr>
             <a:r>
-              <a:rPr sz="2300" b="1" i="0">
+              <a:rPr sz="2400" b="1" i="0">
                 <a:solidFill>
                   <a:srgbClr val="17242E"/>
                 </a:solidFill>
                 <a:latin typeface="Georgia"/>
               </a:rPr>
-              <a:t>I read your chart first — then I answer, citing your sources</a:t>
+              <a:t>This becomes your knowledge library</a:t>
             </a:r>
           </a:p>
         </p:txBody>
@@ -8057,8 +7396,8 @@
         </p:nvSpPr>
         <p:spPr>
           <a:xfrm>
-            <a:off x="822960" y="1828800"/>
-            <a:ext cx="10424160" cy="502920"/>
+            <a:off x="822960" y="1554480"/>
+            <a:ext cx="10424160" cy="548640"/>
           </a:xfrm>
           <a:prstGeom prst="rect">
             <a:avLst/>
@@ -8080,51 +7419,99 @@
               </a:spcAft>
             </a:pPr>
             <a:r>
-              <a:rPr sz="1250" b="0" i="0">
+              <a:rPr sz="1300" b="0" i="0">
                 <a:solidFill>
                   <a:srgbClr val="5A6A72"/>
                 </a:solidFill>
                 <a:latin typeface="Georgia"/>
               </a:rPr>
-              <a:t>Ask me a question or hand me a draft. I don't guess: I </a:t>
-            </a:r>
-            <a:r>
-              <a:rPr sz="1250" b="1" i="0">
+              <a:t>Not my memory — </a:t>
+            </a:r>
+            <a:r>
+              <a:rPr sz="1300" b="1" i="1">
                 <a:solidFill>
                   <a:srgbClr val="17242E"/>
                 </a:solidFill>
                 <a:latin typeface="Georgia"/>
               </a:rPr>
-              <a:t>find the relevant passages in your library first</a:t>
-            </a:r>
-            <a:r>
-              <a:rPr sz="1250" b="0" i="0">
+              <a:t>yours</a:t>
+            </a:r>
+            <a:r>
+              <a:rPr sz="1300" b="0" i="0">
                 <a:solidFill>
                   <a:srgbClr val="5A6A72"/>
                 </a:solidFill>
                 <a:latin typeface="Georgia"/>
               </a:rPr>
-              <a:t>, then write grounded in them — and show which of your sources I used.</a:t>
-            </a:r>
-          </a:p>
-        </p:txBody>
-      </p:sp>
-      <p:sp>
-        <p:nvSpPr>
-          <p:cNvPr id="16" name="Rectangle 15"/>
+              <a:t>. The sources you chose and trust, filed in one chart I've read cover to cover.</a:t>
+            </a:r>
+          </a:p>
+        </p:txBody>
+      </p:sp>
+      <p:sp>
+        <p:nvSpPr>
+          <p:cNvPr id="16" name="Rounded Rectangle 15"/>
           <p:cNvSpPr/>
           <p:nvPr/>
         </p:nvSpPr>
         <p:spPr>
           <a:xfrm>
-            <a:off x="822960" y="2514600"/>
-            <a:ext cx="54864" cy="1901952"/>
-          </a:xfrm>
-          <a:prstGeom prst="rect">
-            <a:avLst/>
+            <a:off x="2011680" y="2468880"/>
+            <a:ext cx="6949440" cy="2468880"/>
+          </a:xfrm>
+          <a:prstGeom prst="roundRect">
+            <a:avLst>
+              <a:gd name="adj" fmla="val 3000"/>
+            </a:avLst>
           </a:prstGeom>
           <a:solidFill>
-            <a:srgbClr val="C0483C"/>
+            <a:srgbClr val="FFFFFF"/>
+          </a:solidFill>
+          <a:ln w="25400">
+            <a:solidFill>
+              <a:srgbClr val="1F5C6B"/>
+            </a:solidFill>
+          </a:ln>
+          <a:effectLst/>
+        </p:spPr>
+        <p:style>
+          <a:lnRef idx="1">
+            <a:schemeClr val="accent1"/>
+          </a:lnRef>
+          <a:fillRef idx="3">
+            <a:schemeClr val="accent1"/>
+          </a:fillRef>
+          <a:effectRef idx="2">
+            <a:schemeClr val="accent1"/>
+          </a:effectRef>
+          <a:fontRef idx="minor">
+            <a:schemeClr val="lt1"/>
+          </a:fontRef>
+        </p:style>
+        <p:txBody>
+          <a:bodyPr rtlCol="0" anchor="ctr"/>
+          <a:lstStyle/>
+          <a:p>
+            <a:pPr algn="ctr"/>
+          </a:p>
+        </p:txBody>
+      </p:sp>
+      <p:sp>
+        <p:nvSpPr>
+          <p:cNvPr id="17" name="Rectangle 16"/>
+          <p:cNvSpPr/>
+          <p:nvPr/>
+        </p:nvSpPr>
+        <p:spPr>
+          <a:xfrm>
+            <a:off x="2011680" y="2468880"/>
+            <a:ext cx="6949440" cy="457200"/>
+          </a:xfrm>
+          <a:prstGeom prst="rect">
+            <a:avLst/>
+          </a:prstGeom>
+          <a:solidFill>
+            <a:srgbClr val="E4F0F1"/>
           </a:solidFill>
           <a:ln>
             <a:noFill/>
@@ -8155,14 +7542,14 @@
       </p:sp>
       <p:sp>
         <p:nvSpPr>
-          <p:cNvPr id="17" name="TextBox 16"/>
+          <p:cNvPr id="18" name="TextBox 17"/>
           <p:cNvSpPr txBox="1"/>
           <p:nvPr/>
         </p:nvSpPr>
         <p:spPr>
           <a:xfrm>
-            <a:off x="1097280" y="2569464"/>
-            <a:ext cx="10241280" cy="566928"/>
+            <a:off x="2286000" y="2468880"/>
+            <a:ext cx="6400800" cy="457200"/>
           </a:xfrm>
           <a:prstGeom prst="rect">
             <a:avLst/>
@@ -8170,230 +7557,43 @@
           <a:noFill/>
         </p:spPr>
         <p:txBody>
-          <a:bodyPr wrap="square" anchor="t" lIns="0" rIns="0" tIns="0" bIns="0">
+          <a:bodyPr wrap="square" anchor="ctr" lIns="0" rIns="0" tIns="0" bIns="0">
             <a:spAutoFit/>
           </a:bodyPr>
           <a:lstStyle/>
           <a:p>
             <a:pPr algn="l">
-              <a:lnSpc>
-                <a:spcPct val="105000"/>
-              </a:lnSpc>
               <a:spcAft>
                 <a:spcPts val="0"/>
               </a:spcAft>
             </a:pPr>
             <a:r>
-              <a:rPr sz="1300" b="1" i="0">
-                <a:solidFill>
-                  <a:srgbClr val="C0483C"/>
+              <a:rPr sz="1100" b="1" i="0">
+                <a:solidFill>
+                  <a:srgbClr val="1F5C6B"/>
                 </a:solidFill>
                 <a:latin typeface="Consolas"/>
               </a:rPr>
-              <a:t>▪ </a:t>
-            </a:r>
-            <a:r>
-              <a:rPr sz="1400" b="1" i="0">
-                <a:solidFill>
-                  <a:srgbClr val="17242E"/>
-                </a:solidFill>
-                <a:latin typeface="Georgia"/>
-              </a:rPr>
-              <a:t>YOU ASK:  </a:t>
-            </a:r>
-            <a:r>
-              <a:rPr sz="1250" b="0" i="0">
-                <a:solidFill>
-                  <a:srgbClr val="5A6A72"/>
-                </a:solidFill>
-                <a:latin typeface="Georgia"/>
-              </a:rPr>
-              <a:t>“Draft a patient handout on starting a DOAC — plain language.”</a:t>
-            </a:r>
-          </a:p>
-        </p:txBody>
-      </p:sp>
-      <p:sp>
-        <p:nvSpPr>
-          <p:cNvPr id="18" name="TextBox 17"/>
-          <p:cNvSpPr txBox="1"/>
-          <p:nvPr/>
-        </p:nvSpPr>
-        <p:spPr>
-          <a:xfrm>
-            <a:off x="1097280" y="3172968"/>
-            <a:ext cx="10241280" cy="566928"/>
-          </a:xfrm>
-          <a:prstGeom prst="rect">
-            <a:avLst/>
-          </a:prstGeom>
-          <a:noFill/>
-        </p:spPr>
-        <p:txBody>
-          <a:bodyPr wrap="square" anchor="t" lIns="0" rIns="0" tIns="0" bIns="0">
-            <a:spAutoFit/>
-          </a:bodyPr>
-          <a:lstStyle/>
-          <a:p>
-            <a:pPr algn="l">
-              <a:lnSpc>
-                <a:spcPct val="105000"/>
-              </a:lnSpc>
-              <a:spcAft>
-                <a:spcPts val="0"/>
-              </a:spcAft>
-            </a:pPr>
-            <a:r>
-              <a:rPr sz="1300" b="1" i="0">
-                <a:solidFill>
-                  <a:srgbClr val="C0483C"/>
-                </a:solidFill>
-                <a:latin typeface="Consolas"/>
-              </a:rPr>
-              <a:t>▪ </a:t>
-            </a:r>
-            <a:r>
-              <a:rPr sz="1400" b="1" i="0">
-                <a:solidFill>
-                  <a:srgbClr val="17242E"/>
-                </a:solidFill>
-                <a:latin typeface="Georgia"/>
-              </a:rPr>
-              <a:t>I RETRIEVE:  </a:t>
-            </a:r>
-            <a:r>
-              <a:rPr sz="1250" b="0" i="0">
-                <a:solidFill>
-                  <a:srgbClr val="5A6A72"/>
-                </a:solidFill>
-                <a:latin typeface="Georgia"/>
-              </a:rPr>
-              <a:t>I find the exact passages in your anticoagulation guideline &amp; drug reference.</a:t>
-            </a:r>
-          </a:p>
-        </p:txBody>
-      </p:sp>
-      <p:sp>
-        <p:nvSpPr>
-          <p:cNvPr id="19" name="TextBox 18"/>
-          <p:cNvSpPr txBox="1"/>
-          <p:nvPr/>
-        </p:nvSpPr>
-        <p:spPr>
-          <a:xfrm>
-            <a:off x="1097280" y="3776472"/>
-            <a:ext cx="10241280" cy="566928"/>
-          </a:xfrm>
-          <a:prstGeom prst="rect">
-            <a:avLst/>
-          </a:prstGeom>
-          <a:noFill/>
-        </p:spPr>
-        <p:txBody>
-          <a:bodyPr wrap="square" anchor="t" lIns="0" rIns="0" tIns="0" bIns="0">
-            <a:spAutoFit/>
-          </a:bodyPr>
-          <a:lstStyle/>
-          <a:p>
-            <a:pPr algn="l">
-              <a:lnSpc>
-                <a:spcPct val="105000"/>
-              </a:lnSpc>
-              <a:spcAft>
-                <a:spcPts val="0"/>
-              </a:spcAft>
-            </a:pPr>
-            <a:r>
-              <a:rPr sz="1300" b="1" i="0">
-                <a:solidFill>
-                  <a:srgbClr val="C0483C"/>
-                </a:solidFill>
-                <a:latin typeface="Consolas"/>
-              </a:rPr>
-              <a:t>▪ </a:t>
-            </a:r>
-            <a:r>
-              <a:rPr sz="1400" b="1" i="0">
-                <a:solidFill>
-                  <a:srgbClr val="17242E"/>
-                </a:solidFill>
-                <a:latin typeface="Georgia"/>
-              </a:rPr>
-              <a:t>I ANSWER:  </a:t>
-            </a:r>
-            <a:r>
-              <a:rPr sz="1250" b="0" i="0">
-                <a:solidFill>
-                  <a:srgbClr val="5A6A72"/>
-                </a:solidFill>
-                <a:latin typeface="Georgia"/>
-              </a:rPr>
-              <a:t>A handout from your evidence, citing your sources — ready to check &amp; hand over.</a:t>
-            </a:r>
-          </a:p>
-        </p:txBody>
-      </p:sp>
-      <p:sp>
-        <p:nvSpPr>
-          <p:cNvPr id="20" name="Rounded Rectangle 19"/>
+              <a:t>CHART — YOUR PRACTICE</a:t>
+            </a:r>
+          </a:p>
+        </p:txBody>
+      </p:sp>
+      <p:sp>
+        <p:nvSpPr>
+          <p:cNvPr id="19" name="Rounded Rectangle 18"/>
           <p:cNvSpPr/>
           <p:nvPr/>
         </p:nvSpPr>
         <p:spPr>
           <a:xfrm>
-            <a:off x="2194560" y="4663440"/>
-            <a:ext cx="7772400" cy="1005840"/>
+            <a:off x="8915400" y="3026664"/>
+            <a:ext cx="1737360" cy="256032"/>
           </a:xfrm>
           <a:prstGeom prst="roundRect">
             <a:avLst>
-              <a:gd name="adj" fmla="val 8000"/>
+              <a:gd name="adj" fmla="val 20000"/>
             </a:avLst>
-          </a:prstGeom>
-          <a:solidFill>
-            <a:srgbClr val="FFFFFF"/>
-          </a:solidFill>
-          <a:ln w="15875">
-            <a:solidFill>
-              <a:srgbClr val="BEDDDF"/>
-            </a:solidFill>
-          </a:ln>
-          <a:effectLst/>
-        </p:spPr>
-        <p:style>
-          <a:lnRef idx="1">
-            <a:schemeClr val="accent1"/>
-          </a:lnRef>
-          <a:fillRef idx="3">
-            <a:schemeClr val="accent1"/>
-          </a:fillRef>
-          <a:effectRef idx="2">
-            <a:schemeClr val="accent1"/>
-          </a:effectRef>
-          <a:fontRef idx="minor">
-            <a:schemeClr val="lt1"/>
-          </a:fontRef>
-        </p:style>
-        <p:txBody>
-          <a:bodyPr rtlCol="0" anchor="ctr"/>
-          <a:lstStyle/>
-          <a:p>
-            <a:pPr algn="ctr"/>
-          </a:p>
-        </p:txBody>
-      </p:sp>
-      <p:sp>
-        <p:nvSpPr>
-          <p:cNvPr id="21" name="Rectangle 20"/>
-          <p:cNvSpPr/>
-          <p:nvPr/>
-        </p:nvSpPr>
-        <p:spPr>
-          <a:xfrm>
-            <a:off x="2194560" y="4663440"/>
-            <a:ext cx="91440" cy="1005840"/>
-          </a:xfrm>
-          <a:prstGeom prst="rect">
-            <a:avLst/>
           </a:prstGeom>
           <a:solidFill>
             <a:srgbClr val="1F5C6B"/>
@@ -8427,14 +7627,14 @@
       </p:sp>
       <p:sp>
         <p:nvSpPr>
-          <p:cNvPr id="22" name="TextBox 21"/>
+          <p:cNvPr id="20" name="TextBox 19"/>
           <p:cNvSpPr txBox="1"/>
           <p:nvPr/>
         </p:nvSpPr>
         <p:spPr>
           <a:xfrm>
-            <a:off x="2514600" y="4846320"/>
-            <a:ext cx="7223760" cy="274320"/>
+            <a:off x="9070848" y="3026664"/>
+            <a:ext cx="1554480" cy="256032"/>
           </a:xfrm>
           <a:prstGeom prst="rect">
             <a:avLst/>
@@ -8442,7 +7642,7 @@
           <a:noFill/>
         </p:spPr>
         <p:txBody>
-          <a:bodyPr wrap="square" anchor="t" lIns="0" rIns="0" tIns="0" bIns="0">
+          <a:bodyPr wrap="square" anchor="ctr" lIns="0" rIns="0" tIns="0" bIns="0">
             <a:spAutoFit/>
           </a:bodyPr>
           <a:lstStyle/>
@@ -8453,27 +7653,71 @@
               </a:spcAft>
             </a:pPr>
             <a:r>
-              <a:rPr sz="1000" b="1" i="0">
-                <a:solidFill>
-                  <a:srgbClr val="1F5C6B"/>
-                </a:solidFill>
-                <a:latin typeface="Consolas"/>
+              <a:rPr sz="1100" b="1" i="0">
+                <a:solidFill>
+                  <a:srgbClr val="FFFFFF"/>
+                </a:solidFill>
+                <a:latin typeface="Calibri"/>
               </a:rPr>
-              <a:t>NOTE — HOW TO THINK OF ME</a:t>
-            </a:r>
-          </a:p>
-        </p:txBody>
-      </p:sp>
-      <p:sp>
-        <p:nvSpPr>
-          <p:cNvPr id="23" name="TextBox 22"/>
+              <a:t>Guidelines</a:t>
+            </a:r>
+          </a:p>
+        </p:txBody>
+      </p:sp>
+      <p:sp>
+        <p:nvSpPr>
+          <p:cNvPr id="21" name="Rectangle 20"/>
+          <p:cNvSpPr/>
+          <p:nvPr/>
+        </p:nvSpPr>
+        <p:spPr>
+          <a:xfrm>
+            <a:off x="2286000" y="3328416"/>
+            <a:ext cx="6400800" cy="13716"/>
+          </a:xfrm>
+          <a:prstGeom prst="rect">
+            <a:avLst/>
+          </a:prstGeom>
+          <a:solidFill>
+            <a:srgbClr val="D9E0DE"/>
+          </a:solidFill>
+          <a:ln>
+            <a:noFill/>
+          </a:ln>
+          <a:effectLst/>
+        </p:spPr>
+        <p:style>
+          <a:lnRef idx="1">
+            <a:schemeClr val="accent1"/>
+          </a:lnRef>
+          <a:fillRef idx="3">
+            <a:schemeClr val="accent1"/>
+          </a:fillRef>
+          <a:effectRef idx="2">
+            <a:schemeClr val="accent1"/>
+          </a:effectRef>
+          <a:fontRef idx="minor">
+            <a:schemeClr val="lt1"/>
+          </a:fontRef>
+        </p:style>
+        <p:txBody>
+          <a:bodyPr rtlCol="0" anchor="ctr"/>
+          <a:lstStyle/>
+          <a:p>
+            <a:pPr algn="ctr"/>
+          </a:p>
+        </p:txBody>
+      </p:sp>
+      <p:sp>
+        <p:nvSpPr>
+          <p:cNvPr id="22" name="TextBox 21"/>
           <p:cNvSpPr txBox="1"/>
           <p:nvPr/>
         </p:nvSpPr>
         <p:spPr>
           <a:xfrm>
-            <a:off x="2514600" y="5166359"/>
-            <a:ext cx="7178040" cy="365760"/>
+            <a:off x="2331720" y="2971800"/>
+            <a:ext cx="6309359" cy="384048"/>
           </a:xfrm>
           <a:prstGeom prst="rect">
             <a:avLst/>
@@ -8481,27 +7725,735 @@
           <a:noFill/>
         </p:spPr>
         <p:txBody>
-          <a:bodyPr wrap="square" anchor="t" lIns="0" rIns="0" tIns="0" bIns="0">
+          <a:bodyPr wrap="square" anchor="ctr" lIns="0" rIns="0" tIns="0" bIns="0">
             <a:spAutoFit/>
           </a:bodyPr>
           <a:lstStyle/>
           <a:p>
             <a:pPr algn="l">
-              <a:lnSpc>
-                <a:spcPct val="112000"/>
-              </a:lnSpc>
               <a:spcAft>
                 <a:spcPts val="0"/>
               </a:spcAft>
             </a:pPr>
             <a:r>
-              <a:rPr sz="1500" b="0" i="0">
+              <a:rPr sz="1200" b="0" i="0">
                 <a:solidFill>
                   <a:srgbClr val="17242E"/>
                 </a:solidFill>
                 <a:latin typeface="Georgia"/>
               </a:rPr>
-              <a:t>The resident who's read every guideline on your chart and cites chapter and verse.</a:t>
+              <a:t>Guidelines</a:t>
+            </a:r>
+          </a:p>
+        </p:txBody>
+      </p:sp>
+      <p:sp>
+        <p:nvSpPr>
+          <p:cNvPr id="23" name="Rounded Rectangle 22"/>
+          <p:cNvSpPr/>
+          <p:nvPr/>
+        </p:nvSpPr>
+        <p:spPr>
+          <a:xfrm>
+            <a:off x="8915400" y="3410712"/>
+            <a:ext cx="1737360" cy="256032"/>
+          </a:xfrm>
+          <a:prstGeom prst="roundRect">
+            <a:avLst>
+              <a:gd name="adj" fmla="val 20000"/>
+            </a:avLst>
+          </a:prstGeom>
+          <a:solidFill>
+            <a:srgbClr val="2F8F83"/>
+          </a:solidFill>
+          <a:ln>
+            <a:noFill/>
+          </a:ln>
+          <a:effectLst/>
+        </p:spPr>
+        <p:style>
+          <a:lnRef idx="1">
+            <a:schemeClr val="accent1"/>
+          </a:lnRef>
+          <a:fillRef idx="3">
+            <a:schemeClr val="accent1"/>
+          </a:fillRef>
+          <a:effectRef idx="2">
+            <a:schemeClr val="accent1"/>
+          </a:effectRef>
+          <a:fontRef idx="minor">
+            <a:schemeClr val="lt1"/>
+          </a:fontRef>
+        </p:style>
+        <p:txBody>
+          <a:bodyPr rtlCol="0" anchor="ctr"/>
+          <a:lstStyle/>
+          <a:p>
+            <a:pPr algn="ctr"/>
+          </a:p>
+        </p:txBody>
+      </p:sp>
+      <p:sp>
+        <p:nvSpPr>
+          <p:cNvPr id="24" name="TextBox 23"/>
+          <p:cNvSpPr txBox="1"/>
+          <p:nvPr/>
+        </p:nvSpPr>
+        <p:spPr>
+          <a:xfrm>
+            <a:off x="9070848" y="3410712"/>
+            <a:ext cx="1554480" cy="256032"/>
+          </a:xfrm>
+          <a:prstGeom prst="rect">
+            <a:avLst/>
+          </a:prstGeom>
+          <a:noFill/>
+        </p:spPr>
+        <p:txBody>
+          <a:bodyPr wrap="square" anchor="ctr" lIns="0" rIns="0" tIns="0" bIns="0">
+            <a:spAutoFit/>
+          </a:bodyPr>
+          <a:lstStyle/>
+          <a:p>
+            <a:pPr algn="l">
+              <a:spcAft>
+                <a:spcPts val="0"/>
+              </a:spcAft>
+            </a:pPr>
+            <a:r>
+              <a:rPr sz="1100" b="1" i="0">
+                <a:solidFill>
+                  <a:srgbClr val="FFFFFF"/>
+                </a:solidFill>
+                <a:latin typeface="Calibri"/>
+              </a:rPr>
+              <a:t>Journal papers</a:t>
+            </a:r>
+          </a:p>
+        </p:txBody>
+      </p:sp>
+      <p:sp>
+        <p:nvSpPr>
+          <p:cNvPr id="25" name="Rectangle 24"/>
+          <p:cNvSpPr/>
+          <p:nvPr/>
+        </p:nvSpPr>
+        <p:spPr>
+          <a:xfrm>
+            <a:off x="2286000" y="3712463"/>
+            <a:ext cx="6400800" cy="13716"/>
+          </a:xfrm>
+          <a:prstGeom prst="rect">
+            <a:avLst/>
+          </a:prstGeom>
+          <a:solidFill>
+            <a:srgbClr val="D9E0DE"/>
+          </a:solidFill>
+          <a:ln>
+            <a:noFill/>
+          </a:ln>
+          <a:effectLst/>
+        </p:spPr>
+        <p:style>
+          <a:lnRef idx="1">
+            <a:schemeClr val="accent1"/>
+          </a:lnRef>
+          <a:fillRef idx="3">
+            <a:schemeClr val="accent1"/>
+          </a:fillRef>
+          <a:effectRef idx="2">
+            <a:schemeClr val="accent1"/>
+          </a:effectRef>
+          <a:fontRef idx="minor">
+            <a:schemeClr val="lt1"/>
+          </a:fontRef>
+        </p:style>
+        <p:txBody>
+          <a:bodyPr rtlCol="0" anchor="ctr"/>
+          <a:lstStyle/>
+          <a:p>
+            <a:pPr algn="ctr"/>
+          </a:p>
+        </p:txBody>
+      </p:sp>
+      <p:sp>
+        <p:nvSpPr>
+          <p:cNvPr id="26" name="TextBox 25"/>
+          <p:cNvSpPr txBox="1"/>
+          <p:nvPr/>
+        </p:nvSpPr>
+        <p:spPr>
+          <a:xfrm>
+            <a:off x="2331720" y="3355848"/>
+            <a:ext cx="6309359" cy="384048"/>
+          </a:xfrm>
+          <a:prstGeom prst="rect">
+            <a:avLst/>
+          </a:prstGeom>
+          <a:noFill/>
+        </p:spPr>
+        <p:txBody>
+          <a:bodyPr wrap="square" anchor="ctr" lIns="0" rIns="0" tIns="0" bIns="0">
+            <a:spAutoFit/>
+          </a:bodyPr>
+          <a:lstStyle/>
+          <a:p>
+            <a:pPr algn="l">
+              <a:spcAft>
+                <a:spcPts val="0"/>
+              </a:spcAft>
+            </a:pPr>
+            <a:r>
+              <a:rPr sz="1200" b="0" i="0">
+                <a:solidFill>
+                  <a:srgbClr val="17242E"/>
+                </a:solidFill>
+                <a:latin typeface="Georgia"/>
+              </a:rPr>
+              <a:t>Journal papers</a:t>
+            </a:r>
+          </a:p>
+        </p:txBody>
+      </p:sp>
+      <p:sp>
+        <p:nvSpPr>
+          <p:cNvPr id="27" name="Rounded Rectangle 26"/>
+          <p:cNvSpPr/>
+          <p:nvPr/>
+        </p:nvSpPr>
+        <p:spPr>
+          <a:xfrm>
+            <a:off x="8915400" y="3794759"/>
+            <a:ext cx="1737360" cy="256032"/>
+          </a:xfrm>
+          <a:prstGeom prst="roundRect">
+            <a:avLst>
+              <a:gd name="adj" fmla="val 20000"/>
+            </a:avLst>
+          </a:prstGeom>
+          <a:solidFill>
+            <a:srgbClr val="3A6EA5"/>
+          </a:solidFill>
+          <a:ln>
+            <a:noFill/>
+          </a:ln>
+          <a:effectLst/>
+        </p:spPr>
+        <p:style>
+          <a:lnRef idx="1">
+            <a:schemeClr val="accent1"/>
+          </a:lnRef>
+          <a:fillRef idx="3">
+            <a:schemeClr val="accent1"/>
+          </a:fillRef>
+          <a:effectRef idx="2">
+            <a:schemeClr val="accent1"/>
+          </a:effectRef>
+          <a:fontRef idx="minor">
+            <a:schemeClr val="lt1"/>
+          </a:fontRef>
+        </p:style>
+        <p:txBody>
+          <a:bodyPr rtlCol="0" anchor="ctr"/>
+          <a:lstStyle/>
+          <a:p>
+            <a:pPr algn="ctr"/>
+          </a:p>
+        </p:txBody>
+      </p:sp>
+      <p:sp>
+        <p:nvSpPr>
+          <p:cNvPr id="28" name="TextBox 27"/>
+          <p:cNvSpPr txBox="1"/>
+          <p:nvPr/>
+        </p:nvSpPr>
+        <p:spPr>
+          <a:xfrm>
+            <a:off x="9070848" y="3794759"/>
+            <a:ext cx="1554480" cy="256032"/>
+          </a:xfrm>
+          <a:prstGeom prst="rect">
+            <a:avLst/>
+          </a:prstGeom>
+          <a:noFill/>
+        </p:spPr>
+        <p:txBody>
+          <a:bodyPr wrap="square" anchor="ctr" lIns="0" rIns="0" tIns="0" bIns="0">
+            <a:spAutoFit/>
+          </a:bodyPr>
+          <a:lstStyle/>
+          <a:p>
+            <a:pPr algn="l">
+              <a:spcAft>
+                <a:spcPts val="0"/>
+              </a:spcAft>
+            </a:pPr>
+            <a:r>
+              <a:rPr sz="1100" b="1" i="0">
+                <a:solidFill>
+                  <a:srgbClr val="FFFFFF"/>
+                </a:solidFill>
+                <a:latin typeface="Calibri"/>
+              </a:rPr>
+              <a:t>Drug reference</a:t>
+            </a:r>
+          </a:p>
+        </p:txBody>
+      </p:sp>
+      <p:sp>
+        <p:nvSpPr>
+          <p:cNvPr id="29" name="Rectangle 28"/>
+          <p:cNvSpPr/>
+          <p:nvPr/>
+        </p:nvSpPr>
+        <p:spPr>
+          <a:xfrm>
+            <a:off x="2286000" y="4096511"/>
+            <a:ext cx="6400800" cy="13716"/>
+          </a:xfrm>
+          <a:prstGeom prst="rect">
+            <a:avLst/>
+          </a:prstGeom>
+          <a:solidFill>
+            <a:srgbClr val="D9E0DE"/>
+          </a:solidFill>
+          <a:ln>
+            <a:noFill/>
+          </a:ln>
+          <a:effectLst/>
+        </p:spPr>
+        <p:style>
+          <a:lnRef idx="1">
+            <a:schemeClr val="accent1"/>
+          </a:lnRef>
+          <a:fillRef idx="3">
+            <a:schemeClr val="accent1"/>
+          </a:fillRef>
+          <a:effectRef idx="2">
+            <a:schemeClr val="accent1"/>
+          </a:effectRef>
+          <a:fontRef idx="minor">
+            <a:schemeClr val="lt1"/>
+          </a:fontRef>
+        </p:style>
+        <p:txBody>
+          <a:bodyPr rtlCol="0" anchor="ctr"/>
+          <a:lstStyle/>
+          <a:p>
+            <a:pPr algn="ctr"/>
+          </a:p>
+        </p:txBody>
+      </p:sp>
+      <p:sp>
+        <p:nvSpPr>
+          <p:cNvPr id="30" name="TextBox 29"/>
+          <p:cNvSpPr txBox="1"/>
+          <p:nvPr/>
+        </p:nvSpPr>
+        <p:spPr>
+          <a:xfrm>
+            <a:off x="2331720" y="3739896"/>
+            <a:ext cx="6309359" cy="384048"/>
+          </a:xfrm>
+          <a:prstGeom prst="rect">
+            <a:avLst/>
+          </a:prstGeom>
+          <a:noFill/>
+        </p:spPr>
+        <p:txBody>
+          <a:bodyPr wrap="square" anchor="ctr" lIns="0" rIns="0" tIns="0" bIns="0">
+            <a:spAutoFit/>
+          </a:bodyPr>
+          <a:lstStyle/>
+          <a:p>
+            <a:pPr algn="l">
+              <a:spcAft>
+                <a:spcPts val="0"/>
+              </a:spcAft>
+            </a:pPr>
+            <a:r>
+              <a:rPr sz="1200" b="0" i="0">
+                <a:solidFill>
+                  <a:srgbClr val="17242E"/>
+                </a:solidFill>
+                <a:latin typeface="Georgia"/>
+              </a:rPr>
+              <a:t>Drug reference</a:t>
+            </a:r>
+          </a:p>
+        </p:txBody>
+      </p:sp>
+      <p:sp>
+        <p:nvSpPr>
+          <p:cNvPr id="31" name="Rounded Rectangle 30"/>
+          <p:cNvSpPr/>
+          <p:nvPr/>
+        </p:nvSpPr>
+        <p:spPr>
+          <a:xfrm>
+            <a:off x="8915400" y="4178807"/>
+            <a:ext cx="1737360" cy="256032"/>
+          </a:xfrm>
+          <a:prstGeom prst="roundRect">
+            <a:avLst>
+              <a:gd name="adj" fmla="val 20000"/>
+            </a:avLst>
+          </a:prstGeom>
+          <a:solidFill>
+            <a:srgbClr val="B5822E"/>
+          </a:solidFill>
+          <a:ln>
+            <a:noFill/>
+          </a:ln>
+          <a:effectLst/>
+        </p:spPr>
+        <p:style>
+          <a:lnRef idx="1">
+            <a:schemeClr val="accent1"/>
+          </a:lnRef>
+          <a:fillRef idx="3">
+            <a:schemeClr val="accent1"/>
+          </a:fillRef>
+          <a:effectRef idx="2">
+            <a:schemeClr val="accent1"/>
+          </a:effectRef>
+          <a:fontRef idx="minor">
+            <a:schemeClr val="lt1"/>
+          </a:fontRef>
+        </p:style>
+        <p:txBody>
+          <a:bodyPr rtlCol="0" anchor="ctr"/>
+          <a:lstStyle/>
+          <a:p>
+            <a:pPr algn="ctr"/>
+          </a:p>
+        </p:txBody>
+      </p:sp>
+      <p:sp>
+        <p:nvSpPr>
+          <p:cNvPr id="32" name="TextBox 31"/>
+          <p:cNvSpPr txBox="1"/>
+          <p:nvPr/>
+        </p:nvSpPr>
+        <p:spPr>
+          <a:xfrm>
+            <a:off x="9070848" y="4178807"/>
+            <a:ext cx="1554480" cy="256032"/>
+          </a:xfrm>
+          <a:prstGeom prst="rect">
+            <a:avLst/>
+          </a:prstGeom>
+          <a:noFill/>
+        </p:spPr>
+        <p:txBody>
+          <a:bodyPr wrap="square" anchor="ctr" lIns="0" rIns="0" tIns="0" bIns="0">
+            <a:spAutoFit/>
+          </a:bodyPr>
+          <a:lstStyle/>
+          <a:p>
+            <a:pPr algn="l">
+              <a:spcAft>
+                <a:spcPts val="0"/>
+              </a:spcAft>
+            </a:pPr>
+            <a:r>
+              <a:rPr sz="1100" b="1" i="0">
+                <a:solidFill>
+                  <a:srgbClr val="FFFFFF"/>
+                </a:solidFill>
+                <a:latin typeface="Calibri"/>
+              </a:rPr>
+              <a:t>Case notes</a:t>
+            </a:r>
+          </a:p>
+        </p:txBody>
+      </p:sp>
+      <p:sp>
+        <p:nvSpPr>
+          <p:cNvPr id="33" name="Rectangle 32"/>
+          <p:cNvSpPr/>
+          <p:nvPr/>
+        </p:nvSpPr>
+        <p:spPr>
+          <a:xfrm>
+            <a:off x="2286000" y="4480559"/>
+            <a:ext cx="6400800" cy="13716"/>
+          </a:xfrm>
+          <a:prstGeom prst="rect">
+            <a:avLst/>
+          </a:prstGeom>
+          <a:solidFill>
+            <a:srgbClr val="D9E0DE"/>
+          </a:solidFill>
+          <a:ln>
+            <a:noFill/>
+          </a:ln>
+          <a:effectLst/>
+        </p:spPr>
+        <p:style>
+          <a:lnRef idx="1">
+            <a:schemeClr val="accent1"/>
+          </a:lnRef>
+          <a:fillRef idx="3">
+            <a:schemeClr val="accent1"/>
+          </a:fillRef>
+          <a:effectRef idx="2">
+            <a:schemeClr val="accent1"/>
+          </a:effectRef>
+          <a:fontRef idx="minor">
+            <a:schemeClr val="lt1"/>
+          </a:fontRef>
+        </p:style>
+        <p:txBody>
+          <a:bodyPr rtlCol="0" anchor="ctr"/>
+          <a:lstStyle/>
+          <a:p>
+            <a:pPr algn="ctr"/>
+          </a:p>
+        </p:txBody>
+      </p:sp>
+      <p:sp>
+        <p:nvSpPr>
+          <p:cNvPr id="34" name="TextBox 33"/>
+          <p:cNvSpPr txBox="1"/>
+          <p:nvPr/>
+        </p:nvSpPr>
+        <p:spPr>
+          <a:xfrm>
+            <a:off x="2331720" y="4123944"/>
+            <a:ext cx="6309359" cy="384048"/>
+          </a:xfrm>
+          <a:prstGeom prst="rect">
+            <a:avLst/>
+          </a:prstGeom>
+          <a:noFill/>
+        </p:spPr>
+        <p:txBody>
+          <a:bodyPr wrap="square" anchor="ctr" lIns="0" rIns="0" tIns="0" bIns="0">
+            <a:spAutoFit/>
+          </a:bodyPr>
+          <a:lstStyle/>
+          <a:p>
+            <a:pPr algn="l">
+              <a:spcAft>
+                <a:spcPts val="0"/>
+              </a:spcAft>
+            </a:pPr>
+            <a:r>
+              <a:rPr sz="1200" b="0" i="0">
+                <a:solidFill>
+                  <a:srgbClr val="17242E"/>
+                </a:solidFill>
+                <a:latin typeface="Georgia"/>
+              </a:rPr>
+              <a:t>Case notes</a:t>
+            </a:r>
+          </a:p>
+        </p:txBody>
+      </p:sp>
+      <p:sp>
+        <p:nvSpPr>
+          <p:cNvPr id="35" name="Rounded Rectangle 34"/>
+          <p:cNvSpPr/>
+          <p:nvPr/>
+        </p:nvSpPr>
+        <p:spPr>
+          <a:xfrm>
+            <a:off x="8915400" y="4562855"/>
+            <a:ext cx="1737360" cy="256032"/>
+          </a:xfrm>
+          <a:prstGeom prst="roundRect">
+            <a:avLst>
+              <a:gd name="adj" fmla="val 20000"/>
+            </a:avLst>
+          </a:prstGeom>
+          <a:solidFill>
+            <a:srgbClr val="6B4E8E"/>
+          </a:solidFill>
+          <a:ln>
+            <a:noFill/>
+          </a:ln>
+          <a:effectLst/>
+        </p:spPr>
+        <p:style>
+          <a:lnRef idx="1">
+            <a:schemeClr val="accent1"/>
+          </a:lnRef>
+          <a:fillRef idx="3">
+            <a:schemeClr val="accent1"/>
+          </a:fillRef>
+          <a:effectRef idx="2">
+            <a:schemeClr val="accent1"/>
+          </a:effectRef>
+          <a:fontRef idx="minor">
+            <a:schemeClr val="lt1"/>
+          </a:fontRef>
+        </p:style>
+        <p:txBody>
+          <a:bodyPr rtlCol="0" anchor="ctr"/>
+          <a:lstStyle/>
+          <a:p>
+            <a:pPr algn="ctr"/>
+          </a:p>
+        </p:txBody>
+      </p:sp>
+      <p:sp>
+        <p:nvSpPr>
+          <p:cNvPr id="36" name="TextBox 35"/>
+          <p:cNvSpPr txBox="1"/>
+          <p:nvPr/>
+        </p:nvSpPr>
+        <p:spPr>
+          <a:xfrm>
+            <a:off x="9070848" y="4562855"/>
+            <a:ext cx="1554480" cy="256032"/>
+          </a:xfrm>
+          <a:prstGeom prst="rect">
+            <a:avLst/>
+          </a:prstGeom>
+          <a:noFill/>
+        </p:spPr>
+        <p:txBody>
+          <a:bodyPr wrap="square" anchor="ctr" lIns="0" rIns="0" tIns="0" bIns="0">
+            <a:spAutoFit/>
+          </a:bodyPr>
+          <a:lstStyle/>
+          <a:p>
+            <a:pPr algn="l">
+              <a:spcAft>
+                <a:spcPts val="0"/>
+              </a:spcAft>
+            </a:pPr>
+            <a:r>
+              <a:rPr sz="1100" b="1" i="0">
+                <a:solidFill>
+                  <a:srgbClr val="FFFFFF"/>
+                </a:solidFill>
+                <a:latin typeface="Calibri"/>
+              </a:rPr>
+              <a:t>Society updates</a:t>
+            </a:r>
+          </a:p>
+        </p:txBody>
+      </p:sp>
+      <p:sp>
+        <p:nvSpPr>
+          <p:cNvPr id="37" name="Rectangle 36"/>
+          <p:cNvSpPr/>
+          <p:nvPr/>
+        </p:nvSpPr>
+        <p:spPr>
+          <a:xfrm>
+            <a:off x="2286000" y="4864607"/>
+            <a:ext cx="6400800" cy="13716"/>
+          </a:xfrm>
+          <a:prstGeom prst="rect">
+            <a:avLst/>
+          </a:prstGeom>
+          <a:solidFill>
+            <a:srgbClr val="D9E0DE"/>
+          </a:solidFill>
+          <a:ln>
+            <a:noFill/>
+          </a:ln>
+          <a:effectLst/>
+        </p:spPr>
+        <p:style>
+          <a:lnRef idx="1">
+            <a:schemeClr val="accent1"/>
+          </a:lnRef>
+          <a:fillRef idx="3">
+            <a:schemeClr val="accent1"/>
+          </a:fillRef>
+          <a:effectRef idx="2">
+            <a:schemeClr val="accent1"/>
+          </a:effectRef>
+          <a:fontRef idx="minor">
+            <a:schemeClr val="lt1"/>
+          </a:fontRef>
+        </p:style>
+        <p:txBody>
+          <a:bodyPr rtlCol="0" anchor="ctr"/>
+          <a:lstStyle/>
+          <a:p>
+            <a:pPr algn="ctr"/>
+          </a:p>
+        </p:txBody>
+      </p:sp>
+      <p:sp>
+        <p:nvSpPr>
+          <p:cNvPr id="38" name="TextBox 37"/>
+          <p:cNvSpPr txBox="1"/>
+          <p:nvPr/>
+        </p:nvSpPr>
+        <p:spPr>
+          <a:xfrm>
+            <a:off x="2331720" y="4507992"/>
+            <a:ext cx="6309359" cy="384048"/>
+          </a:xfrm>
+          <a:prstGeom prst="rect">
+            <a:avLst/>
+          </a:prstGeom>
+          <a:noFill/>
+        </p:spPr>
+        <p:txBody>
+          <a:bodyPr wrap="square" anchor="ctr" lIns="0" rIns="0" tIns="0" bIns="0">
+            <a:spAutoFit/>
+          </a:bodyPr>
+          <a:lstStyle/>
+          <a:p>
+            <a:pPr algn="l">
+              <a:spcAft>
+                <a:spcPts val="0"/>
+              </a:spcAft>
+            </a:pPr>
+            <a:r>
+              <a:rPr sz="1200" b="0" i="0">
+                <a:solidFill>
+                  <a:srgbClr val="17242E"/>
+                </a:solidFill>
+                <a:latin typeface="Georgia"/>
+              </a:rPr>
+              <a:t>Society updates</a:t>
+            </a:r>
+          </a:p>
+        </p:txBody>
+      </p:sp>
+      <p:sp>
+        <p:nvSpPr>
+          <p:cNvPr id="39" name="TextBox 38"/>
+          <p:cNvSpPr txBox="1"/>
+          <p:nvPr/>
+        </p:nvSpPr>
+        <p:spPr>
+          <a:xfrm>
+            <a:off x="822960" y="5257800"/>
+            <a:ext cx="10424160" cy="365760"/>
+          </a:xfrm>
+          <a:prstGeom prst="rect">
+            <a:avLst/>
+          </a:prstGeom>
+          <a:noFill/>
+        </p:spPr>
+        <p:txBody>
+          <a:bodyPr wrap="square" anchor="t" lIns="0" rIns="0" tIns="0" bIns="0">
+            <a:spAutoFit/>
+          </a:bodyPr>
+          <a:lstStyle/>
+          <a:p>
+            <a:pPr algn="ctr">
+              <a:spcAft>
+                <a:spcPts val="0"/>
+              </a:spcAft>
+            </a:pPr>
+            <a:r>
+              <a:rPr sz="1250" b="0" i="1">
+                <a:solidFill>
+                  <a:srgbClr val="5A6A72"/>
+                </a:solidFill>
+                <a:latin typeface="Georgia"/>
+              </a:rPr>
+              <a:t>Every tab here, you filed. That's the point — I work from your chart, not the web's.</a:t>
             </a:r>
           </a:p>
         </p:txBody>
@@ -8729,7 +8681,7 @@
                 </a:solidFill>
                 <a:latin typeface="Consolas"/>
               </a:rPr>
-              <a:t>SECTION 05 — BEYOND YOUR SHELF</a:t>
+              <a:t>SECTION 04 — HOW I WORK</a:t>
             </a:r>
           </a:p>
         </p:txBody>
@@ -8995,7 +8947,7 @@
         <p:spPr>
           <a:xfrm>
             <a:off x="822960" y="960120"/>
-            <a:ext cx="10607040" cy="548640"/>
+            <a:ext cx="10607040" cy="822960"/>
           </a:xfrm>
           <a:prstGeom prst="rect">
             <a:avLst/>
@@ -9009,6 +8961,9 @@
           <a:lstStyle/>
           <a:p>
             <a:pPr algn="l">
+              <a:lnSpc>
+                <a:spcPct val="100000"/>
+              </a:lnSpc>
               <a:spcAft>
                 <a:spcPts val="0"/>
               </a:spcAft>
@@ -9020,7 +8975,7 @@
                 </a:solidFill>
                 <a:latin typeface="Georgia"/>
               </a:rPr>
-              <a:t>Your knowledge library can outgrow your physical shelf</a:t>
+              <a:t>I read your chart first — then I answer, citing your sources</a:t>
             </a:r>
           </a:p>
         </p:txBody>
@@ -9033,8 +8988,8 @@
         </p:nvSpPr>
         <p:spPr>
           <a:xfrm>
-            <a:off x="822960" y="1554480"/>
-            <a:ext cx="10424160" cy="640080"/>
+            <a:off x="822960" y="1828800"/>
+            <a:ext cx="10424160" cy="502920"/>
           </a:xfrm>
           <a:prstGeom prst="rect">
             <a:avLst/>
@@ -9062,7 +9017,7 @@
                 </a:solidFill>
                 <a:latin typeface="Georgia"/>
               </a:rPr>
-              <a:t>I can pull authoritative reference and public-domain texts into your knowledge library from </a:t>
+              <a:t>Ask me a question or hand me a draft. I don't guess: I </a:t>
             </a:r>
             <a:r>
               <a:rPr sz="1250" b="1" i="0">
@@ -9071,7 +9026,7 @@
                 </a:solidFill>
                 <a:latin typeface="Georgia"/>
               </a:rPr>
-              <a:t>curated catalogs</a:t>
+              <a:t>find the relevant passages in your library first</a:t>
             </a:r>
             <a:r>
               <a:rPr sz="1250" b="0" i="0">
@@ -9080,34 +9035,30 @@
                 </a:solidFill>
                 <a:latin typeface="Georgia"/>
               </a:rPr>
-              <a:t> — then ground every answer at a physician's depth.</a:t>
-            </a:r>
-          </a:p>
-        </p:txBody>
-      </p:sp>
-      <p:sp>
-        <p:nvSpPr>
-          <p:cNvPr id="16" name="Rounded Rectangle 15"/>
+              <a:t>, then write grounded in them — and show which of your sources I used.</a:t>
+            </a:r>
+          </a:p>
+        </p:txBody>
+      </p:sp>
+      <p:sp>
+        <p:nvSpPr>
+          <p:cNvPr id="16" name="Rectangle 15"/>
           <p:cNvSpPr/>
           <p:nvPr/>
         </p:nvSpPr>
         <p:spPr>
           <a:xfrm>
-            <a:off x="1280160" y="2468880"/>
-            <a:ext cx="4206240" cy="1554480"/>
-          </a:xfrm>
-          <a:prstGeom prst="roundRect">
-            <a:avLst>
-              <a:gd name="adj" fmla="val 6000"/>
-            </a:avLst>
+            <a:off x="822960" y="2514600"/>
+            <a:ext cx="54864" cy="1901952"/>
+          </a:xfrm>
+          <a:prstGeom prst="rect">
+            <a:avLst/>
           </a:prstGeom>
           <a:solidFill>
-            <a:srgbClr val="FFFFFF"/>
+            <a:srgbClr val="C0483C"/>
           </a:solidFill>
-          <a:ln w="12700">
-            <a:solidFill>
-              <a:srgbClr val="D9E0DE"/>
-            </a:solidFill>
+          <a:ln>
+            <a:noFill/>
           </a:ln>
           <a:effectLst/>
         </p:spPr>
@@ -9141,8 +9092,8 @@
         </p:nvSpPr>
         <p:spPr>
           <a:xfrm>
-            <a:off x="1554480" y="2697480"/>
-            <a:ext cx="3657600" cy="320040"/>
+            <a:off x="1097280" y="2569464"/>
+            <a:ext cx="10241280" cy="566928"/>
           </a:xfrm>
           <a:prstGeom prst="rect">
             <a:avLst/>
@@ -9156,80 +9107,53 @@
           <a:lstStyle/>
           <a:p>
             <a:pPr algn="l">
+              <a:lnSpc>
+                <a:spcPct val="105000"/>
+              </a:lnSpc>
               <a:spcAft>
                 <a:spcPts val="0"/>
               </a:spcAft>
             </a:pPr>
             <a:r>
-              <a:rPr sz="1350" b="1" i="0">
+              <a:rPr sz="1300" b="1" i="0">
+                <a:solidFill>
+                  <a:srgbClr val="C0483C"/>
+                </a:solidFill>
+                <a:latin typeface="Consolas"/>
+              </a:rPr>
+              <a:t>▪ </a:t>
+            </a:r>
+            <a:r>
+              <a:rPr sz="1400" b="1" i="0">
                 <a:solidFill>
                   <a:srgbClr val="17242E"/>
                 </a:solidFill>
                 <a:latin typeface="Georgia"/>
               </a:rPr>
-              <a:t>What you bring</a:t>
-            </a:r>
-          </a:p>
-        </p:txBody>
-      </p:sp>
-      <p:sp>
-        <p:nvSpPr>
-          <p:cNvPr id="18" name="Rounded Rectangle 17"/>
-          <p:cNvSpPr/>
-          <p:nvPr/>
-        </p:nvSpPr>
-        <p:spPr>
-          <a:xfrm>
-            <a:off x="1554480" y="3154680"/>
-            <a:ext cx="1188720" cy="365760"/>
-          </a:xfrm>
-          <a:prstGeom prst="roundRect">
-            <a:avLst>
-              <a:gd name="adj" fmla="val 30000"/>
-            </a:avLst>
-          </a:prstGeom>
-          <a:solidFill>
-            <a:srgbClr val="F4F6F5"/>
-          </a:solidFill>
-          <a:ln w="12700">
-            <a:solidFill>
-              <a:srgbClr val="D9E0DE"/>
-            </a:solidFill>
-          </a:ln>
-          <a:effectLst/>
-        </p:spPr>
-        <p:style>
-          <a:lnRef idx="1">
-            <a:schemeClr val="accent1"/>
-          </a:lnRef>
-          <a:fillRef idx="3">
-            <a:schemeClr val="accent1"/>
-          </a:fillRef>
-          <a:effectRef idx="2">
-            <a:schemeClr val="accent1"/>
-          </a:effectRef>
-          <a:fontRef idx="minor">
-            <a:schemeClr val="lt1"/>
-          </a:fontRef>
-        </p:style>
-        <p:txBody>
-          <a:bodyPr rtlCol="0" anchor="ctr"/>
-          <a:lstStyle/>
-          <a:p>
-            <a:pPr algn="ctr"/>
-          </a:p>
-        </p:txBody>
-      </p:sp>
-      <p:sp>
-        <p:nvSpPr>
-          <p:cNvPr id="19" name="TextBox 18"/>
+              <a:t>YOU ASK:  </a:t>
+            </a:r>
+            <a:r>
+              <a:rPr sz="1250" b="0" i="0">
+                <a:solidFill>
+                  <a:srgbClr val="5A6A72"/>
+                </a:solidFill>
+                <a:latin typeface="Georgia"/>
+              </a:rPr>
+              <a:t>“Draft a patient handout on starting a DOAC — plain language.”</a:t>
+            </a:r>
+          </a:p>
+        </p:txBody>
+      </p:sp>
+      <p:sp>
+        <p:nvSpPr>
+          <p:cNvPr id="18" name="TextBox 17"/>
           <p:cNvSpPr txBox="1"/>
           <p:nvPr/>
         </p:nvSpPr>
         <p:spPr>
           <a:xfrm>
-            <a:off x="1554480" y="3154680"/>
-            <a:ext cx="1188720" cy="365760"/>
+            <a:off x="1097280" y="3172968"/>
+            <a:ext cx="10241280" cy="566928"/>
           </a:xfrm>
           <a:prstGeom prst="rect">
             <a:avLst/>
@@ -9237,86 +9161,59 @@
           <a:noFill/>
         </p:spPr>
         <p:txBody>
-          <a:bodyPr wrap="square" anchor="ctr" lIns="0" rIns="0" tIns="0" bIns="0">
+          <a:bodyPr wrap="square" anchor="t" lIns="0" rIns="0" tIns="0" bIns="0">
             <a:spAutoFit/>
           </a:bodyPr>
           <a:lstStyle/>
           <a:p>
-            <a:pPr algn="ctr">
+            <a:pPr algn="l">
+              <a:lnSpc>
+                <a:spcPct val="105000"/>
+              </a:lnSpc>
               <a:spcAft>
                 <a:spcPts val="0"/>
               </a:spcAft>
             </a:pPr>
             <a:r>
-              <a:rPr sz="1000" b="0" i="0">
-                <a:solidFill>
-                  <a:srgbClr val="17242E"/>
+              <a:rPr sz="1300" b="1" i="0">
+                <a:solidFill>
+                  <a:srgbClr val="C0483C"/>
                 </a:solidFill>
                 <a:latin typeface="Consolas"/>
               </a:rPr>
-              <a:t>guidelines</a:t>
-            </a:r>
-          </a:p>
-        </p:txBody>
-      </p:sp>
-      <p:sp>
-        <p:nvSpPr>
-          <p:cNvPr id="20" name="Rounded Rectangle 19"/>
-          <p:cNvSpPr/>
-          <p:nvPr/>
-        </p:nvSpPr>
-        <p:spPr>
-          <a:xfrm>
-            <a:off x="2880360" y="3154680"/>
-            <a:ext cx="822960" cy="365760"/>
-          </a:xfrm>
-          <a:prstGeom prst="roundRect">
-            <a:avLst>
-              <a:gd name="adj" fmla="val 30000"/>
-            </a:avLst>
-          </a:prstGeom>
-          <a:solidFill>
-            <a:srgbClr val="F4F6F5"/>
-          </a:solidFill>
-          <a:ln w="12700">
-            <a:solidFill>
-              <a:srgbClr val="D9E0DE"/>
-            </a:solidFill>
-          </a:ln>
-          <a:effectLst/>
-        </p:spPr>
-        <p:style>
-          <a:lnRef idx="1">
-            <a:schemeClr val="accent1"/>
-          </a:lnRef>
-          <a:fillRef idx="3">
-            <a:schemeClr val="accent1"/>
-          </a:fillRef>
-          <a:effectRef idx="2">
-            <a:schemeClr val="accent1"/>
-          </a:effectRef>
-          <a:fontRef idx="minor">
-            <a:schemeClr val="lt1"/>
-          </a:fontRef>
-        </p:style>
-        <p:txBody>
-          <a:bodyPr rtlCol="0" anchor="ctr"/>
-          <a:lstStyle/>
-          <a:p>
-            <a:pPr algn="ctr"/>
-          </a:p>
-        </p:txBody>
-      </p:sp>
-      <p:sp>
-        <p:nvSpPr>
-          <p:cNvPr id="21" name="TextBox 20"/>
+              <a:t>▪ </a:t>
+            </a:r>
+            <a:r>
+              <a:rPr sz="1400" b="1" i="0">
+                <a:solidFill>
+                  <a:srgbClr val="17242E"/>
+                </a:solidFill>
+                <a:latin typeface="Georgia"/>
+              </a:rPr>
+              <a:t>I RETRIEVE:  </a:t>
+            </a:r>
+            <a:r>
+              <a:rPr sz="1250" b="0" i="0">
+                <a:solidFill>
+                  <a:srgbClr val="5A6A72"/>
+                </a:solidFill>
+                <a:latin typeface="Georgia"/>
+              </a:rPr>
+              <a:t>I find the exact passages in your anticoagulation guideline &amp; drug reference.</a:t>
+            </a:r>
+          </a:p>
+        </p:txBody>
+      </p:sp>
+      <p:sp>
+        <p:nvSpPr>
+          <p:cNvPr id="19" name="TextBox 18"/>
           <p:cNvSpPr txBox="1"/>
           <p:nvPr/>
         </p:nvSpPr>
         <p:spPr>
           <a:xfrm>
-            <a:off x="2880360" y="3154680"/>
-            <a:ext cx="822960" cy="365760"/>
+            <a:off x="1097280" y="3776472"/>
+            <a:ext cx="10241280" cy="566928"/>
           </a:xfrm>
           <a:prstGeom prst="rect">
             <a:avLst/>
@@ -9324,433 +9221,67 @@
           <a:noFill/>
         </p:spPr>
         <p:txBody>
-          <a:bodyPr wrap="square" anchor="ctr" lIns="0" rIns="0" tIns="0" bIns="0">
+          <a:bodyPr wrap="square" anchor="t" lIns="0" rIns="0" tIns="0" bIns="0">
             <a:spAutoFit/>
           </a:bodyPr>
           <a:lstStyle/>
           <a:p>
-            <a:pPr algn="ctr">
+            <a:pPr algn="l">
+              <a:lnSpc>
+                <a:spcPct val="105000"/>
+              </a:lnSpc>
               <a:spcAft>
                 <a:spcPts val="0"/>
               </a:spcAft>
             </a:pPr>
             <a:r>
-              <a:rPr sz="1000" b="0" i="0">
-                <a:solidFill>
-                  <a:srgbClr val="17242E"/>
+              <a:rPr sz="1300" b="1" i="0">
+                <a:solidFill>
+                  <a:srgbClr val="C0483C"/>
                 </a:solidFill>
                 <a:latin typeface="Consolas"/>
               </a:rPr>
-              <a:t>papers</a:t>
-            </a:r>
-          </a:p>
-        </p:txBody>
-      </p:sp>
-      <p:sp>
-        <p:nvSpPr>
-          <p:cNvPr id="22" name="Rounded Rectangle 21"/>
+              <a:t>▪ </a:t>
+            </a:r>
+            <a:r>
+              <a:rPr sz="1400" b="1" i="0">
+                <a:solidFill>
+                  <a:srgbClr val="17242E"/>
+                </a:solidFill>
+                <a:latin typeface="Georgia"/>
+              </a:rPr>
+              <a:t>I ANSWER:  </a:t>
+            </a:r>
+            <a:r>
+              <a:rPr sz="1250" b="0" i="0">
+                <a:solidFill>
+                  <a:srgbClr val="5A6A72"/>
+                </a:solidFill>
+                <a:latin typeface="Georgia"/>
+              </a:rPr>
+              <a:t>A handout from your evidence, citing your sources — ready to check &amp; hand over.</a:t>
+            </a:r>
+          </a:p>
+        </p:txBody>
+      </p:sp>
+      <p:sp>
+        <p:nvSpPr>
+          <p:cNvPr id="20" name="Rounded Rectangle 19"/>
           <p:cNvSpPr/>
           <p:nvPr/>
         </p:nvSpPr>
         <p:spPr>
           <a:xfrm>
-            <a:off x="3840480" y="3154680"/>
-            <a:ext cx="731520" cy="365760"/>
+            <a:off x="2194560" y="4526280"/>
+            <a:ext cx="7772400" cy="914400"/>
           </a:xfrm>
           <a:prstGeom prst="roundRect">
             <a:avLst>
-              <a:gd name="adj" fmla="val 30000"/>
-            </a:avLst>
-          </a:prstGeom>
-          <a:solidFill>
-            <a:srgbClr val="F4F6F5"/>
-          </a:solidFill>
-          <a:ln w="12700">
-            <a:solidFill>
-              <a:srgbClr val="D9E0DE"/>
-            </a:solidFill>
-          </a:ln>
-          <a:effectLst/>
-        </p:spPr>
-        <p:style>
-          <a:lnRef idx="1">
-            <a:schemeClr val="accent1"/>
-          </a:lnRef>
-          <a:fillRef idx="3">
-            <a:schemeClr val="accent1"/>
-          </a:fillRef>
-          <a:effectRef idx="2">
-            <a:schemeClr val="accent1"/>
-          </a:effectRef>
-          <a:fontRef idx="minor">
-            <a:schemeClr val="lt1"/>
-          </a:fontRef>
-        </p:style>
-        <p:txBody>
-          <a:bodyPr rtlCol="0" anchor="ctr"/>
-          <a:lstStyle/>
-          <a:p>
-            <a:pPr algn="ctr"/>
-          </a:p>
-        </p:txBody>
-      </p:sp>
-      <p:sp>
-        <p:nvSpPr>
-          <p:cNvPr id="23" name="TextBox 22"/>
-          <p:cNvSpPr txBox="1"/>
-          <p:nvPr/>
-        </p:nvSpPr>
-        <p:spPr>
-          <a:xfrm>
-            <a:off x="3840480" y="3154680"/>
-            <a:ext cx="731520" cy="365760"/>
-          </a:xfrm>
-          <a:prstGeom prst="rect">
-            <a:avLst/>
-          </a:prstGeom>
-          <a:noFill/>
-        </p:spPr>
-        <p:txBody>
-          <a:bodyPr wrap="square" anchor="ctr" lIns="0" rIns="0" tIns="0" bIns="0">
-            <a:spAutoFit/>
-          </a:bodyPr>
-          <a:lstStyle/>
-          <a:p>
-            <a:pPr algn="ctr">
-              <a:spcAft>
-                <a:spcPts val="0"/>
-              </a:spcAft>
-            </a:pPr>
-            <a:r>
-              <a:rPr sz="1000" b="0" i="0">
-                <a:solidFill>
-                  <a:srgbClr val="17242E"/>
-                </a:solidFill>
-                <a:latin typeface="Consolas"/>
-              </a:rPr>
-              <a:t>notes</a:t>
-            </a:r>
-          </a:p>
-        </p:txBody>
-      </p:sp>
-      <p:sp>
-        <p:nvSpPr>
-          <p:cNvPr id="24" name="TextBox 23"/>
-          <p:cNvSpPr txBox="1"/>
-          <p:nvPr/>
-        </p:nvSpPr>
-        <p:spPr>
-          <a:xfrm>
-            <a:off x="5669280" y="2468880"/>
-            <a:ext cx="914400" cy="1554480"/>
-          </a:xfrm>
-          <a:prstGeom prst="rect">
-            <a:avLst/>
-          </a:prstGeom>
-          <a:noFill/>
-        </p:spPr>
-        <p:txBody>
-          <a:bodyPr wrap="square" anchor="ctr" lIns="0" rIns="0" tIns="0" bIns="0">
-            <a:spAutoFit/>
-          </a:bodyPr>
-          <a:lstStyle/>
-          <a:p>
-            <a:pPr algn="ctr">
-              <a:spcAft>
-                <a:spcPts val="0"/>
-              </a:spcAft>
-            </a:pPr>
-            <a:r>
-              <a:rPr sz="2800" b="0" i="0">
-                <a:solidFill>
-                  <a:srgbClr val="5A6A72"/>
-                </a:solidFill>
-                <a:latin typeface="Consolas"/>
-              </a:rPr>
-              <a:t>＋</a:t>
-            </a:r>
-          </a:p>
-        </p:txBody>
-      </p:sp>
-      <p:sp>
-        <p:nvSpPr>
-          <p:cNvPr id="25" name="Rounded Rectangle 24"/>
-          <p:cNvSpPr/>
-          <p:nvPr/>
-        </p:nvSpPr>
-        <p:spPr>
-          <a:xfrm>
-            <a:off x="6720840" y="2468880"/>
-            <a:ext cx="4206240" cy="1554480"/>
-          </a:xfrm>
-          <a:prstGeom prst="roundRect">
-            <a:avLst>
-              <a:gd name="adj" fmla="val 6000"/>
+              <a:gd name="adj" fmla="val 8000"/>
             </a:avLst>
           </a:prstGeom>
           <a:solidFill>
             <a:srgbClr val="FFFFFF"/>
-          </a:solidFill>
-          <a:ln w="12700">
-            <a:solidFill>
-              <a:srgbClr val="D9E0DE"/>
-            </a:solidFill>
-          </a:ln>
-          <a:effectLst/>
-        </p:spPr>
-        <p:style>
-          <a:lnRef idx="1">
-            <a:schemeClr val="accent1"/>
-          </a:lnRef>
-          <a:fillRef idx="3">
-            <a:schemeClr val="accent1"/>
-          </a:fillRef>
-          <a:effectRef idx="2">
-            <a:schemeClr val="accent1"/>
-          </a:effectRef>
-          <a:fontRef idx="minor">
-            <a:schemeClr val="lt1"/>
-          </a:fontRef>
-        </p:style>
-        <p:txBody>
-          <a:bodyPr rtlCol="0" anchor="ctr"/>
-          <a:lstStyle/>
-          <a:p>
-            <a:pPr algn="ctr"/>
-          </a:p>
-        </p:txBody>
-      </p:sp>
-      <p:sp>
-        <p:nvSpPr>
-          <p:cNvPr id="26" name="TextBox 25"/>
-          <p:cNvSpPr txBox="1"/>
-          <p:nvPr/>
-        </p:nvSpPr>
-        <p:spPr>
-          <a:xfrm>
-            <a:off x="6995159" y="2697480"/>
-            <a:ext cx="3657600" cy="320040"/>
-          </a:xfrm>
-          <a:prstGeom prst="rect">
-            <a:avLst/>
-          </a:prstGeom>
-          <a:noFill/>
-        </p:spPr>
-        <p:txBody>
-          <a:bodyPr wrap="square" anchor="t" lIns="0" rIns="0" tIns="0" bIns="0">
-            <a:spAutoFit/>
-          </a:bodyPr>
-          <a:lstStyle/>
-          <a:p>
-            <a:pPr algn="l">
-              <a:spcAft>
-                <a:spcPts val="0"/>
-              </a:spcAft>
-            </a:pPr>
-            <a:r>
-              <a:rPr sz="1350" b="1" i="0">
-                <a:solidFill>
-                  <a:srgbClr val="17242E"/>
-                </a:solidFill>
-                <a:latin typeface="Georgia"/>
-              </a:rPr>
-              <a:t>What I pull in</a:t>
-            </a:r>
-          </a:p>
-        </p:txBody>
-      </p:sp>
-      <p:sp>
-        <p:nvSpPr>
-          <p:cNvPr id="27" name="Rounded Rectangle 26"/>
-          <p:cNvSpPr/>
-          <p:nvPr/>
-        </p:nvSpPr>
-        <p:spPr>
-          <a:xfrm>
-            <a:off x="6995159" y="3154680"/>
-            <a:ext cx="1645920" cy="365760"/>
-          </a:xfrm>
-          <a:prstGeom prst="roundRect">
-            <a:avLst>
-              <a:gd name="adj" fmla="val 30000"/>
-            </a:avLst>
-          </a:prstGeom>
-          <a:solidFill>
-            <a:srgbClr val="F4F6F5"/>
-          </a:solidFill>
-          <a:ln w="12700">
-            <a:solidFill>
-              <a:srgbClr val="D9E0DE"/>
-            </a:solidFill>
-          </a:ln>
-          <a:effectLst/>
-        </p:spPr>
-        <p:style>
-          <a:lnRef idx="1">
-            <a:schemeClr val="accent1"/>
-          </a:lnRef>
-          <a:fillRef idx="3">
-            <a:schemeClr val="accent1"/>
-          </a:fillRef>
-          <a:effectRef idx="2">
-            <a:schemeClr val="accent1"/>
-          </a:effectRef>
-          <a:fontRef idx="minor">
-            <a:schemeClr val="lt1"/>
-          </a:fontRef>
-        </p:style>
-        <p:txBody>
-          <a:bodyPr rtlCol="0" anchor="ctr"/>
-          <a:lstStyle/>
-          <a:p>
-            <a:pPr algn="ctr"/>
-          </a:p>
-        </p:txBody>
-      </p:sp>
-      <p:sp>
-        <p:nvSpPr>
-          <p:cNvPr id="28" name="TextBox 27"/>
-          <p:cNvSpPr txBox="1"/>
-          <p:nvPr/>
-        </p:nvSpPr>
-        <p:spPr>
-          <a:xfrm>
-            <a:off x="6995159" y="3154680"/>
-            <a:ext cx="1645920" cy="365760"/>
-          </a:xfrm>
-          <a:prstGeom prst="rect">
-            <a:avLst/>
-          </a:prstGeom>
-          <a:noFill/>
-        </p:spPr>
-        <p:txBody>
-          <a:bodyPr wrap="square" anchor="ctr" lIns="0" rIns="0" tIns="0" bIns="0">
-            <a:spAutoFit/>
-          </a:bodyPr>
-          <a:lstStyle/>
-          <a:p>
-            <a:pPr algn="ctr">
-              <a:spcAft>
-                <a:spcPts val="0"/>
-              </a:spcAft>
-            </a:pPr>
-            <a:r>
-              <a:rPr sz="1000" b="0" i="0">
-                <a:solidFill>
-                  <a:srgbClr val="17242E"/>
-                </a:solidFill>
-                <a:latin typeface="Consolas"/>
-              </a:rPr>
-              <a:t>reference texts</a:t>
-            </a:r>
-          </a:p>
-        </p:txBody>
-      </p:sp>
-      <p:sp>
-        <p:nvSpPr>
-          <p:cNvPr id="29" name="Rounded Rectangle 28"/>
-          <p:cNvSpPr/>
-          <p:nvPr/>
-        </p:nvSpPr>
-        <p:spPr>
-          <a:xfrm>
-            <a:off x="8778240" y="3154680"/>
-            <a:ext cx="1737360" cy="365760"/>
-          </a:xfrm>
-          <a:prstGeom prst="roundRect">
-            <a:avLst>
-              <a:gd name="adj" fmla="val 30000"/>
-            </a:avLst>
-          </a:prstGeom>
-          <a:solidFill>
-            <a:srgbClr val="F4F6F5"/>
-          </a:solidFill>
-          <a:ln w="12700">
-            <a:solidFill>
-              <a:srgbClr val="D9E0DE"/>
-            </a:solidFill>
-          </a:ln>
-          <a:effectLst/>
-        </p:spPr>
-        <p:style>
-          <a:lnRef idx="1">
-            <a:schemeClr val="accent1"/>
-          </a:lnRef>
-          <a:fillRef idx="3">
-            <a:schemeClr val="accent1"/>
-          </a:fillRef>
-          <a:effectRef idx="2">
-            <a:schemeClr val="accent1"/>
-          </a:effectRef>
-          <a:fontRef idx="minor">
-            <a:schemeClr val="lt1"/>
-          </a:fontRef>
-        </p:style>
-        <p:txBody>
-          <a:bodyPr rtlCol="0" anchor="ctr"/>
-          <a:lstStyle/>
-          <a:p>
-            <a:pPr algn="ctr"/>
-          </a:p>
-        </p:txBody>
-      </p:sp>
-      <p:sp>
-        <p:nvSpPr>
-          <p:cNvPr id="30" name="TextBox 29"/>
-          <p:cNvSpPr txBox="1"/>
-          <p:nvPr/>
-        </p:nvSpPr>
-        <p:spPr>
-          <a:xfrm>
-            <a:off x="8778240" y="3154680"/>
-            <a:ext cx="1737360" cy="365760"/>
-          </a:xfrm>
-          <a:prstGeom prst="rect">
-            <a:avLst/>
-          </a:prstGeom>
-          <a:noFill/>
-        </p:spPr>
-        <p:txBody>
-          <a:bodyPr wrap="square" anchor="ctr" lIns="0" rIns="0" tIns="0" bIns="0">
-            <a:spAutoFit/>
-          </a:bodyPr>
-          <a:lstStyle/>
-          <a:p>
-            <a:pPr algn="ctr">
-              <a:spcAft>
-                <a:spcPts val="0"/>
-              </a:spcAft>
-            </a:pPr>
-            <a:r>
-              <a:rPr sz="1000" b="0" i="0">
-                <a:solidFill>
-                  <a:srgbClr val="17242E"/>
-                </a:solidFill>
-                <a:latin typeface="Consolas"/>
-              </a:rPr>
-              <a:t>curated catalogs</a:t>
-            </a:r>
-          </a:p>
-        </p:txBody>
-      </p:sp>
-      <p:sp>
-        <p:nvSpPr>
-          <p:cNvPr id="31" name="Rounded Rectangle 30"/>
-          <p:cNvSpPr/>
-          <p:nvPr/>
-        </p:nvSpPr>
-        <p:spPr>
-          <a:xfrm>
-            <a:off x="2560320" y="4434840"/>
-            <a:ext cx="7040880" cy="822960"/>
-          </a:xfrm>
-          <a:prstGeom prst="roundRect">
-            <a:avLst>
-              <a:gd name="adj" fmla="val 20000"/>
-            </a:avLst>
-          </a:prstGeom>
-          <a:solidFill>
-            <a:srgbClr val="E4F0F1"/>
           </a:solidFill>
           <a:ln w="15875">
             <a:solidFill>
@@ -9783,14 +9314,58 @@
       </p:sp>
       <p:sp>
         <p:nvSpPr>
-          <p:cNvPr id="32" name="TextBox 31"/>
+          <p:cNvPr id="21" name="Rectangle 20"/>
+          <p:cNvSpPr/>
+          <p:nvPr/>
+        </p:nvSpPr>
+        <p:spPr>
+          <a:xfrm>
+            <a:off x="2194560" y="4526280"/>
+            <a:ext cx="91440" cy="914400"/>
+          </a:xfrm>
+          <a:prstGeom prst="rect">
+            <a:avLst/>
+          </a:prstGeom>
+          <a:solidFill>
+            <a:srgbClr val="1F5C6B"/>
+          </a:solidFill>
+          <a:ln>
+            <a:noFill/>
+          </a:ln>
+          <a:effectLst/>
+        </p:spPr>
+        <p:style>
+          <a:lnRef idx="1">
+            <a:schemeClr val="accent1"/>
+          </a:lnRef>
+          <a:fillRef idx="3">
+            <a:schemeClr val="accent1"/>
+          </a:fillRef>
+          <a:effectRef idx="2">
+            <a:schemeClr val="accent1"/>
+          </a:effectRef>
+          <a:fontRef idx="minor">
+            <a:schemeClr val="lt1"/>
+          </a:fontRef>
+        </p:style>
+        <p:txBody>
+          <a:bodyPr rtlCol="0" anchor="ctr"/>
+          <a:lstStyle/>
+          <a:p>
+            <a:pPr algn="ctr"/>
+          </a:p>
+        </p:txBody>
+      </p:sp>
+      <p:sp>
+        <p:nvSpPr>
+          <p:cNvPr id="22" name="TextBox 21"/>
           <p:cNvSpPr txBox="1"/>
           <p:nvPr/>
         </p:nvSpPr>
         <p:spPr>
           <a:xfrm>
-            <a:off x="2743200" y="4434840"/>
-            <a:ext cx="6675120" cy="822960"/>
+            <a:off x="2514600" y="4709160"/>
+            <a:ext cx="7223760" cy="274320"/>
           </a:xfrm>
           <a:prstGeom prst="rect">
             <a:avLst/>
@@ -9798,7 +9373,88 @@
           <a:noFill/>
         </p:spPr>
         <p:txBody>
-          <a:bodyPr wrap="square" anchor="ctr" lIns="0" rIns="0" tIns="0" bIns="0">
+          <a:bodyPr wrap="square" anchor="t" lIns="0" rIns="0" tIns="0" bIns="0">
+            <a:spAutoFit/>
+          </a:bodyPr>
+          <a:lstStyle/>
+          <a:p>
+            <a:pPr algn="l">
+              <a:spcAft>
+                <a:spcPts val="0"/>
+              </a:spcAft>
+            </a:pPr>
+            <a:r>
+              <a:rPr sz="1000" b="1" i="0">
+                <a:solidFill>
+                  <a:srgbClr val="1F5C6B"/>
+                </a:solidFill>
+                <a:latin typeface="Consolas"/>
+              </a:rPr>
+              <a:t>NOTE — HOW TO THINK OF ME</a:t>
+            </a:r>
+          </a:p>
+        </p:txBody>
+      </p:sp>
+      <p:sp>
+        <p:nvSpPr>
+          <p:cNvPr id="23" name="TextBox 22"/>
+          <p:cNvSpPr txBox="1"/>
+          <p:nvPr/>
+        </p:nvSpPr>
+        <p:spPr>
+          <a:xfrm>
+            <a:off x="2514600" y="5029200"/>
+            <a:ext cx="7178040" cy="274320"/>
+          </a:xfrm>
+          <a:prstGeom prst="rect">
+            <a:avLst/>
+          </a:prstGeom>
+          <a:noFill/>
+        </p:spPr>
+        <p:txBody>
+          <a:bodyPr wrap="square" anchor="t" lIns="0" rIns="0" tIns="0" bIns="0">
+            <a:spAutoFit/>
+          </a:bodyPr>
+          <a:lstStyle/>
+          <a:p>
+            <a:pPr algn="l">
+              <a:lnSpc>
+                <a:spcPct val="112000"/>
+              </a:lnSpc>
+              <a:spcAft>
+                <a:spcPts val="0"/>
+              </a:spcAft>
+            </a:pPr>
+            <a:r>
+              <a:rPr sz="1500" b="0" i="0">
+                <a:solidFill>
+                  <a:srgbClr val="17242E"/>
+                </a:solidFill>
+                <a:latin typeface="Georgia"/>
+              </a:rPr>
+              <a:t>Like a diligent resident: it works from your sources and shows its citations — you verify before you sign off.</a:t>
+            </a:r>
+          </a:p>
+        </p:txBody>
+      </p:sp>
+      <p:sp>
+        <p:nvSpPr>
+          <p:cNvPr id="24" name="TextBox 23"/>
+          <p:cNvSpPr txBox="1"/>
+          <p:nvPr/>
+        </p:nvSpPr>
+        <p:spPr>
+          <a:xfrm>
+            <a:off x="2194560" y="5623560"/>
+            <a:ext cx="7772400" cy="365760"/>
+          </a:xfrm>
+          <a:prstGeom prst="rect">
+            <a:avLst/>
+          </a:prstGeom>
+          <a:noFill/>
+        </p:spPr>
+        <p:txBody>
+          <a:bodyPr wrap="square" anchor="t" lIns="0" rIns="0" tIns="0" bIns="0">
             <a:spAutoFit/>
           </a:bodyPr>
           <a:lstStyle/>
@@ -9809,22 +9465,13 @@
               </a:spcAft>
             </a:pPr>
             <a:r>
-              <a:rPr sz="1400" b="1" i="0">
-                <a:solidFill>
-                  <a:srgbClr val="1F5C6B"/>
-                </a:solidFill>
-                <a:latin typeface="Georgia"/>
+              <a:rPr sz="1050" b="1" i="0">
+                <a:solidFill>
+                  <a:srgbClr val="C0483C"/>
+                </a:solidFill>
+                <a:latin typeface="Consolas"/>
               </a:rPr>
-              <a:t>= one knowledge library  </a:t>
-            </a:r>
-            <a:r>
-              <a:rPr sz="1250" b="0" i="0">
-                <a:solidFill>
-                  <a:srgbClr val="17242E"/>
-                </a:solidFill>
-                <a:latin typeface="Georgia"/>
-              </a:rPr>
-              <a:t>— broader than your shelf, still curated, still private.</a:t>
+              <a:t>PROOF (your data here): retrieved passage matched the cited source in __% of N test queries · physician-reviewed.</a:t>
             </a:r>
           </a:p>
         </p:txBody>
@@ -10052,7 +9699,7 @@
                 </a:solidFill>
                 <a:latin typeface="Consolas"/>
               </a:rPr>
-              <a:t>SECTION 06 — PLAN · UPGRADE</a:t>
+              <a:t>SECTION 05 — BEYOND YOUR SHELF</a:t>
             </a:r>
           </a:p>
         </p:txBody>
@@ -10343,6 +9990,1371 @@
                 </a:solidFill>
                 <a:latin typeface="Georgia"/>
               </a:rPr>
+              <a:t>Your knowledge library can outgrow your physical shelf</a:t>
+            </a:r>
+          </a:p>
+        </p:txBody>
+      </p:sp>
+      <p:sp>
+        <p:nvSpPr>
+          <p:cNvPr id="15" name="TextBox 14"/>
+          <p:cNvSpPr txBox="1"/>
+          <p:nvPr/>
+        </p:nvSpPr>
+        <p:spPr>
+          <a:xfrm>
+            <a:off x="822960" y="1554480"/>
+            <a:ext cx="10424160" cy="640080"/>
+          </a:xfrm>
+          <a:prstGeom prst="rect">
+            <a:avLst/>
+          </a:prstGeom>
+          <a:noFill/>
+        </p:spPr>
+        <p:txBody>
+          <a:bodyPr wrap="square" anchor="t" lIns="0" rIns="0" tIns="0" bIns="0">
+            <a:spAutoFit/>
+          </a:bodyPr>
+          <a:lstStyle/>
+          <a:p>
+            <a:pPr algn="l">
+              <a:lnSpc>
+                <a:spcPct val="105000"/>
+              </a:lnSpc>
+              <a:spcAft>
+                <a:spcPts val="0"/>
+              </a:spcAft>
+            </a:pPr>
+            <a:r>
+              <a:rPr sz="1250" b="0" i="0">
+                <a:solidFill>
+                  <a:srgbClr val="5A6A72"/>
+                </a:solidFill>
+                <a:latin typeface="Georgia"/>
+              </a:rPr>
+              <a:t>I can pull authoritative reference and public-domain texts into your knowledge library from </a:t>
+            </a:r>
+            <a:r>
+              <a:rPr sz="1250" b="1" i="0">
+                <a:solidFill>
+                  <a:srgbClr val="17242E"/>
+                </a:solidFill>
+                <a:latin typeface="Georgia"/>
+              </a:rPr>
+              <a:t>curated catalogs</a:t>
+            </a:r>
+            <a:r>
+              <a:rPr sz="1250" b="0" i="0">
+                <a:solidFill>
+                  <a:srgbClr val="5A6A72"/>
+                </a:solidFill>
+                <a:latin typeface="Georgia"/>
+              </a:rPr>
+              <a:t> — then ground every answer at a physician's depth.</a:t>
+            </a:r>
+          </a:p>
+        </p:txBody>
+      </p:sp>
+      <p:sp>
+        <p:nvSpPr>
+          <p:cNvPr id="16" name="Rounded Rectangle 15"/>
+          <p:cNvSpPr/>
+          <p:nvPr/>
+        </p:nvSpPr>
+        <p:spPr>
+          <a:xfrm>
+            <a:off x="1280160" y="2468880"/>
+            <a:ext cx="4206240" cy="1554480"/>
+          </a:xfrm>
+          <a:prstGeom prst="roundRect">
+            <a:avLst>
+              <a:gd name="adj" fmla="val 6000"/>
+            </a:avLst>
+          </a:prstGeom>
+          <a:solidFill>
+            <a:srgbClr val="FFFFFF"/>
+          </a:solidFill>
+          <a:ln w="12700">
+            <a:solidFill>
+              <a:srgbClr val="D9E0DE"/>
+            </a:solidFill>
+          </a:ln>
+          <a:effectLst/>
+        </p:spPr>
+        <p:style>
+          <a:lnRef idx="1">
+            <a:schemeClr val="accent1"/>
+          </a:lnRef>
+          <a:fillRef idx="3">
+            <a:schemeClr val="accent1"/>
+          </a:fillRef>
+          <a:effectRef idx="2">
+            <a:schemeClr val="accent1"/>
+          </a:effectRef>
+          <a:fontRef idx="minor">
+            <a:schemeClr val="lt1"/>
+          </a:fontRef>
+        </p:style>
+        <p:txBody>
+          <a:bodyPr rtlCol="0" anchor="ctr"/>
+          <a:lstStyle/>
+          <a:p>
+            <a:pPr algn="ctr"/>
+          </a:p>
+        </p:txBody>
+      </p:sp>
+      <p:sp>
+        <p:nvSpPr>
+          <p:cNvPr id="17" name="TextBox 16"/>
+          <p:cNvSpPr txBox="1"/>
+          <p:nvPr/>
+        </p:nvSpPr>
+        <p:spPr>
+          <a:xfrm>
+            <a:off x="1554480" y="2697480"/>
+            <a:ext cx="3657600" cy="320040"/>
+          </a:xfrm>
+          <a:prstGeom prst="rect">
+            <a:avLst/>
+          </a:prstGeom>
+          <a:noFill/>
+        </p:spPr>
+        <p:txBody>
+          <a:bodyPr wrap="square" anchor="t" lIns="0" rIns="0" tIns="0" bIns="0">
+            <a:spAutoFit/>
+          </a:bodyPr>
+          <a:lstStyle/>
+          <a:p>
+            <a:pPr algn="l">
+              <a:spcAft>
+                <a:spcPts val="0"/>
+              </a:spcAft>
+            </a:pPr>
+            <a:r>
+              <a:rPr sz="1350" b="1" i="0">
+                <a:solidFill>
+                  <a:srgbClr val="17242E"/>
+                </a:solidFill>
+                <a:latin typeface="Georgia"/>
+              </a:rPr>
+              <a:t>What you bring</a:t>
+            </a:r>
+          </a:p>
+        </p:txBody>
+      </p:sp>
+      <p:sp>
+        <p:nvSpPr>
+          <p:cNvPr id="18" name="Rounded Rectangle 17"/>
+          <p:cNvSpPr/>
+          <p:nvPr/>
+        </p:nvSpPr>
+        <p:spPr>
+          <a:xfrm>
+            <a:off x="1554480" y="3154680"/>
+            <a:ext cx="1188720" cy="365760"/>
+          </a:xfrm>
+          <a:prstGeom prst="roundRect">
+            <a:avLst>
+              <a:gd name="adj" fmla="val 30000"/>
+            </a:avLst>
+          </a:prstGeom>
+          <a:solidFill>
+            <a:srgbClr val="F4F6F5"/>
+          </a:solidFill>
+          <a:ln w="12700">
+            <a:solidFill>
+              <a:srgbClr val="D9E0DE"/>
+            </a:solidFill>
+          </a:ln>
+          <a:effectLst/>
+        </p:spPr>
+        <p:style>
+          <a:lnRef idx="1">
+            <a:schemeClr val="accent1"/>
+          </a:lnRef>
+          <a:fillRef idx="3">
+            <a:schemeClr val="accent1"/>
+          </a:fillRef>
+          <a:effectRef idx="2">
+            <a:schemeClr val="accent1"/>
+          </a:effectRef>
+          <a:fontRef idx="minor">
+            <a:schemeClr val="lt1"/>
+          </a:fontRef>
+        </p:style>
+        <p:txBody>
+          <a:bodyPr rtlCol="0" anchor="ctr"/>
+          <a:lstStyle/>
+          <a:p>
+            <a:pPr algn="ctr"/>
+          </a:p>
+        </p:txBody>
+      </p:sp>
+      <p:sp>
+        <p:nvSpPr>
+          <p:cNvPr id="19" name="TextBox 18"/>
+          <p:cNvSpPr txBox="1"/>
+          <p:nvPr/>
+        </p:nvSpPr>
+        <p:spPr>
+          <a:xfrm>
+            <a:off x="1554480" y="3154680"/>
+            <a:ext cx="1188720" cy="365760"/>
+          </a:xfrm>
+          <a:prstGeom prst="rect">
+            <a:avLst/>
+          </a:prstGeom>
+          <a:noFill/>
+        </p:spPr>
+        <p:txBody>
+          <a:bodyPr wrap="square" anchor="ctr" lIns="0" rIns="0" tIns="0" bIns="0">
+            <a:spAutoFit/>
+          </a:bodyPr>
+          <a:lstStyle/>
+          <a:p>
+            <a:pPr algn="ctr">
+              <a:spcAft>
+                <a:spcPts val="0"/>
+              </a:spcAft>
+            </a:pPr>
+            <a:r>
+              <a:rPr sz="1000" b="0" i="0">
+                <a:solidFill>
+                  <a:srgbClr val="17242E"/>
+                </a:solidFill>
+                <a:latin typeface="Consolas"/>
+              </a:rPr>
+              <a:t>guidelines</a:t>
+            </a:r>
+          </a:p>
+        </p:txBody>
+      </p:sp>
+      <p:sp>
+        <p:nvSpPr>
+          <p:cNvPr id="20" name="Rounded Rectangle 19"/>
+          <p:cNvSpPr/>
+          <p:nvPr/>
+        </p:nvSpPr>
+        <p:spPr>
+          <a:xfrm>
+            <a:off x="2880360" y="3154680"/>
+            <a:ext cx="822960" cy="365760"/>
+          </a:xfrm>
+          <a:prstGeom prst="roundRect">
+            <a:avLst>
+              <a:gd name="adj" fmla="val 30000"/>
+            </a:avLst>
+          </a:prstGeom>
+          <a:solidFill>
+            <a:srgbClr val="F4F6F5"/>
+          </a:solidFill>
+          <a:ln w="12700">
+            <a:solidFill>
+              <a:srgbClr val="D9E0DE"/>
+            </a:solidFill>
+          </a:ln>
+          <a:effectLst/>
+        </p:spPr>
+        <p:style>
+          <a:lnRef idx="1">
+            <a:schemeClr val="accent1"/>
+          </a:lnRef>
+          <a:fillRef idx="3">
+            <a:schemeClr val="accent1"/>
+          </a:fillRef>
+          <a:effectRef idx="2">
+            <a:schemeClr val="accent1"/>
+          </a:effectRef>
+          <a:fontRef idx="minor">
+            <a:schemeClr val="lt1"/>
+          </a:fontRef>
+        </p:style>
+        <p:txBody>
+          <a:bodyPr rtlCol="0" anchor="ctr"/>
+          <a:lstStyle/>
+          <a:p>
+            <a:pPr algn="ctr"/>
+          </a:p>
+        </p:txBody>
+      </p:sp>
+      <p:sp>
+        <p:nvSpPr>
+          <p:cNvPr id="21" name="TextBox 20"/>
+          <p:cNvSpPr txBox="1"/>
+          <p:nvPr/>
+        </p:nvSpPr>
+        <p:spPr>
+          <a:xfrm>
+            <a:off x="2880360" y="3154680"/>
+            <a:ext cx="822960" cy="365760"/>
+          </a:xfrm>
+          <a:prstGeom prst="rect">
+            <a:avLst/>
+          </a:prstGeom>
+          <a:noFill/>
+        </p:spPr>
+        <p:txBody>
+          <a:bodyPr wrap="square" anchor="ctr" lIns="0" rIns="0" tIns="0" bIns="0">
+            <a:spAutoFit/>
+          </a:bodyPr>
+          <a:lstStyle/>
+          <a:p>
+            <a:pPr algn="ctr">
+              <a:spcAft>
+                <a:spcPts val="0"/>
+              </a:spcAft>
+            </a:pPr>
+            <a:r>
+              <a:rPr sz="1000" b="0" i="0">
+                <a:solidFill>
+                  <a:srgbClr val="17242E"/>
+                </a:solidFill>
+                <a:latin typeface="Consolas"/>
+              </a:rPr>
+              <a:t>papers</a:t>
+            </a:r>
+          </a:p>
+        </p:txBody>
+      </p:sp>
+      <p:sp>
+        <p:nvSpPr>
+          <p:cNvPr id="22" name="Rounded Rectangle 21"/>
+          <p:cNvSpPr/>
+          <p:nvPr/>
+        </p:nvSpPr>
+        <p:spPr>
+          <a:xfrm>
+            <a:off x="3840480" y="3154680"/>
+            <a:ext cx="731520" cy="365760"/>
+          </a:xfrm>
+          <a:prstGeom prst="roundRect">
+            <a:avLst>
+              <a:gd name="adj" fmla="val 30000"/>
+            </a:avLst>
+          </a:prstGeom>
+          <a:solidFill>
+            <a:srgbClr val="F4F6F5"/>
+          </a:solidFill>
+          <a:ln w="12700">
+            <a:solidFill>
+              <a:srgbClr val="D9E0DE"/>
+            </a:solidFill>
+          </a:ln>
+          <a:effectLst/>
+        </p:spPr>
+        <p:style>
+          <a:lnRef idx="1">
+            <a:schemeClr val="accent1"/>
+          </a:lnRef>
+          <a:fillRef idx="3">
+            <a:schemeClr val="accent1"/>
+          </a:fillRef>
+          <a:effectRef idx="2">
+            <a:schemeClr val="accent1"/>
+          </a:effectRef>
+          <a:fontRef idx="minor">
+            <a:schemeClr val="lt1"/>
+          </a:fontRef>
+        </p:style>
+        <p:txBody>
+          <a:bodyPr rtlCol="0" anchor="ctr"/>
+          <a:lstStyle/>
+          <a:p>
+            <a:pPr algn="ctr"/>
+          </a:p>
+        </p:txBody>
+      </p:sp>
+      <p:sp>
+        <p:nvSpPr>
+          <p:cNvPr id="23" name="TextBox 22"/>
+          <p:cNvSpPr txBox="1"/>
+          <p:nvPr/>
+        </p:nvSpPr>
+        <p:spPr>
+          <a:xfrm>
+            <a:off x="3840480" y="3154680"/>
+            <a:ext cx="731520" cy="365760"/>
+          </a:xfrm>
+          <a:prstGeom prst="rect">
+            <a:avLst/>
+          </a:prstGeom>
+          <a:noFill/>
+        </p:spPr>
+        <p:txBody>
+          <a:bodyPr wrap="square" anchor="ctr" lIns="0" rIns="0" tIns="0" bIns="0">
+            <a:spAutoFit/>
+          </a:bodyPr>
+          <a:lstStyle/>
+          <a:p>
+            <a:pPr algn="ctr">
+              <a:spcAft>
+                <a:spcPts val="0"/>
+              </a:spcAft>
+            </a:pPr>
+            <a:r>
+              <a:rPr sz="1000" b="0" i="0">
+                <a:solidFill>
+                  <a:srgbClr val="17242E"/>
+                </a:solidFill>
+                <a:latin typeface="Consolas"/>
+              </a:rPr>
+              <a:t>notes</a:t>
+            </a:r>
+          </a:p>
+        </p:txBody>
+      </p:sp>
+      <p:sp>
+        <p:nvSpPr>
+          <p:cNvPr id="24" name="TextBox 23"/>
+          <p:cNvSpPr txBox="1"/>
+          <p:nvPr/>
+        </p:nvSpPr>
+        <p:spPr>
+          <a:xfrm>
+            <a:off x="5669280" y="2468880"/>
+            <a:ext cx="914400" cy="1554480"/>
+          </a:xfrm>
+          <a:prstGeom prst="rect">
+            <a:avLst/>
+          </a:prstGeom>
+          <a:noFill/>
+        </p:spPr>
+        <p:txBody>
+          <a:bodyPr wrap="square" anchor="ctr" lIns="0" rIns="0" tIns="0" bIns="0">
+            <a:spAutoFit/>
+          </a:bodyPr>
+          <a:lstStyle/>
+          <a:p>
+            <a:pPr algn="ctr">
+              <a:spcAft>
+                <a:spcPts val="0"/>
+              </a:spcAft>
+            </a:pPr>
+            <a:r>
+              <a:rPr sz="2800" b="0" i="0">
+                <a:solidFill>
+                  <a:srgbClr val="5A6A72"/>
+                </a:solidFill>
+                <a:latin typeface="Consolas"/>
+              </a:rPr>
+              <a:t>＋</a:t>
+            </a:r>
+          </a:p>
+        </p:txBody>
+      </p:sp>
+      <p:sp>
+        <p:nvSpPr>
+          <p:cNvPr id="25" name="Rounded Rectangle 24"/>
+          <p:cNvSpPr/>
+          <p:nvPr/>
+        </p:nvSpPr>
+        <p:spPr>
+          <a:xfrm>
+            <a:off x="6720840" y="2468880"/>
+            <a:ext cx="4206240" cy="1554480"/>
+          </a:xfrm>
+          <a:prstGeom prst="roundRect">
+            <a:avLst>
+              <a:gd name="adj" fmla="val 6000"/>
+            </a:avLst>
+          </a:prstGeom>
+          <a:solidFill>
+            <a:srgbClr val="FFFFFF"/>
+          </a:solidFill>
+          <a:ln w="12700">
+            <a:solidFill>
+              <a:srgbClr val="D9E0DE"/>
+            </a:solidFill>
+          </a:ln>
+          <a:effectLst/>
+        </p:spPr>
+        <p:style>
+          <a:lnRef idx="1">
+            <a:schemeClr val="accent1"/>
+          </a:lnRef>
+          <a:fillRef idx="3">
+            <a:schemeClr val="accent1"/>
+          </a:fillRef>
+          <a:effectRef idx="2">
+            <a:schemeClr val="accent1"/>
+          </a:effectRef>
+          <a:fontRef idx="minor">
+            <a:schemeClr val="lt1"/>
+          </a:fontRef>
+        </p:style>
+        <p:txBody>
+          <a:bodyPr rtlCol="0" anchor="ctr"/>
+          <a:lstStyle/>
+          <a:p>
+            <a:pPr algn="ctr"/>
+          </a:p>
+        </p:txBody>
+      </p:sp>
+      <p:sp>
+        <p:nvSpPr>
+          <p:cNvPr id="26" name="TextBox 25"/>
+          <p:cNvSpPr txBox="1"/>
+          <p:nvPr/>
+        </p:nvSpPr>
+        <p:spPr>
+          <a:xfrm>
+            <a:off x="6995159" y="2697480"/>
+            <a:ext cx="3657600" cy="320040"/>
+          </a:xfrm>
+          <a:prstGeom prst="rect">
+            <a:avLst/>
+          </a:prstGeom>
+          <a:noFill/>
+        </p:spPr>
+        <p:txBody>
+          <a:bodyPr wrap="square" anchor="t" lIns="0" rIns="0" tIns="0" bIns="0">
+            <a:spAutoFit/>
+          </a:bodyPr>
+          <a:lstStyle/>
+          <a:p>
+            <a:pPr algn="l">
+              <a:spcAft>
+                <a:spcPts val="0"/>
+              </a:spcAft>
+            </a:pPr>
+            <a:r>
+              <a:rPr sz="1350" b="1" i="0">
+                <a:solidFill>
+                  <a:srgbClr val="17242E"/>
+                </a:solidFill>
+                <a:latin typeface="Georgia"/>
+              </a:rPr>
+              <a:t>What I pull in</a:t>
+            </a:r>
+          </a:p>
+        </p:txBody>
+      </p:sp>
+      <p:sp>
+        <p:nvSpPr>
+          <p:cNvPr id="27" name="Rounded Rectangle 26"/>
+          <p:cNvSpPr/>
+          <p:nvPr/>
+        </p:nvSpPr>
+        <p:spPr>
+          <a:xfrm>
+            <a:off x="6995159" y="3154680"/>
+            <a:ext cx="1645920" cy="365760"/>
+          </a:xfrm>
+          <a:prstGeom prst="roundRect">
+            <a:avLst>
+              <a:gd name="adj" fmla="val 30000"/>
+            </a:avLst>
+          </a:prstGeom>
+          <a:solidFill>
+            <a:srgbClr val="F4F6F5"/>
+          </a:solidFill>
+          <a:ln w="12700">
+            <a:solidFill>
+              <a:srgbClr val="D9E0DE"/>
+            </a:solidFill>
+          </a:ln>
+          <a:effectLst/>
+        </p:spPr>
+        <p:style>
+          <a:lnRef idx="1">
+            <a:schemeClr val="accent1"/>
+          </a:lnRef>
+          <a:fillRef idx="3">
+            <a:schemeClr val="accent1"/>
+          </a:fillRef>
+          <a:effectRef idx="2">
+            <a:schemeClr val="accent1"/>
+          </a:effectRef>
+          <a:fontRef idx="minor">
+            <a:schemeClr val="lt1"/>
+          </a:fontRef>
+        </p:style>
+        <p:txBody>
+          <a:bodyPr rtlCol="0" anchor="ctr"/>
+          <a:lstStyle/>
+          <a:p>
+            <a:pPr algn="ctr"/>
+          </a:p>
+        </p:txBody>
+      </p:sp>
+      <p:sp>
+        <p:nvSpPr>
+          <p:cNvPr id="28" name="TextBox 27"/>
+          <p:cNvSpPr txBox="1"/>
+          <p:nvPr/>
+        </p:nvSpPr>
+        <p:spPr>
+          <a:xfrm>
+            <a:off x="6995159" y="3154680"/>
+            <a:ext cx="1645920" cy="365760"/>
+          </a:xfrm>
+          <a:prstGeom prst="rect">
+            <a:avLst/>
+          </a:prstGeom>
+          <a:noFill/>
+        </p:spPr>
+        <p:txBody>
+          <a:bodyPr wrap="square" anchor="ctr" lIns="0" rIns="0" tIns="0" bIns="0">
+            <a:spAutoFit/>
+          </a:bodyPr>
+          <a:lstStyle/>
+          <a:p>
+            <a:pPr algn="ctr">
+              <a:spcAft>
+                <a:spcPts val="0"/>
+              </a:spcAft>
+            </a:pPr>
+            <a:r>
+              <a:rPr sz="1000" b="0" i="0">
+                <a:solidFill>
+                  <a:srgbClr val="17242E"/>
+                </a:solidFill>
+                <a:latin typeface="Consolas"/>
+              </a:rPr>
+              <a:t>reference texts</a:t>
+            </a:r>
+          </a:p>
+        </p:txBody>
+      </p:sp>
+      <p:sp>
+        <p:nvSpPr>
+          <p:cNvPr id="29" name="Rounded Rectangle 28"/>
+          <p:cNvSpPr/>
+          <p:nvPr/>
+        </p:nvSpPr>
+        <p:spPr>
+          <a:xfrm>
+            <a:off x="8778240" y="3154680"/>
+            <a:ext cx="1737360" cy="365760"/>
+          </a:xfrm>
+          <a:prstGeom prst="roundRect">
+            <a:avLst>
+              <a:gd name="adj" fmla="val 30000"/>
+            </a:avLst>
+          </a:prstGeom>
+          <a:solidFill>
+            <a:srgbClr val="F4F6F5"/>
+          </a:solidFill>
+          <a:ln w="12700">
+            <a:solidFill>
+              <a:srgbClr val="D9E0DE"/>
+            </a:solidFill>
+          </a:ln>
+          <a:effectLst/>
+        </p:spPr>
+        <p:style>
+          <a:lnRef idx="1">
+            <a:schemeClr val="accent1"/>
+          </a:lnRef>
+          <a:fillRef idx="3">
+            <a:schemeClr val="accent1"/>
+          </a:fillRef>
+          <a:effectRef idx="2">
+            <a:schemeClr val="accent1"/>
+          </a:effectRef>
+          <a:fontRef idx="minor">
+            <a:schemeClr val="lt1"/>
+          </a:fontRef>
+        </p:style>
+        <p:txBody>
+          <a:bodyPr rtlCol="0" anchor="ctr"/>
+          <a:lstStyle/>
+          <a:p>
+            <a:pPr algn="ctr"/>
+          </a:p>
+        </p:txBody>
+      </p:sp>
+      <p:sp>
+        <p:nvSpPr>
+          <p:cNvPr id="30" name="TextBox 29"/>
+          <p:cNvSpPr txBox="1"/>
+          <p:nvPr/>
+        </p:nvSpPr>
+        <p:spPr>
+          <a:xfrm>
+            <a:off x="8778240" y="3154680"/>
+            <a:ext cx="1737360" cy="365760"/>
+          </a:xfrm>
+          <a:prstGeom prst="rect">
+            <a:avLst/>
+          </a:prstGeom>
+          <a:noFill/>
+        </p:spPr>
+        <p:txBody>
+          <a:bodyPr wrap="square" anchor="ctr" lIns="0" rIns="0" tIns="0" bIns="0">
+            <a:spAutoFit/>
+          </a:bodyPr>
+          <a:lstStyle/>
+          <a:p>
+            <a:pPr algn="ctr">
+              <a:spcAft>
+                <a:spcPts val="0"/>
+              </a:spcAft>
+            </a:pPr>
+            <a:r>
+              <a:rPr sz="1000" b="0" i="0">
+                <a:solidFill>
+                  <a:srgbClr val="17242E"/>
+                </a:solidFill>
+                <a:latin typeface="Consolas"/>
+              </a:rPr>
+              <a:t>curated catalogs</a:t>
+            </a:r>
+          </a:p>
+        </p:txBody>
+      </p:sp>
+      <p:sp>
+        <p:nvSpPr>
+          <p:cNvPr id="31" name="Rounded Rectangle 30"/>
+          <p:cNvSpPr/>
+          <p:nvPr/>
+        </p:nvSpPr>
+        <p:spPr>
+          <a:xfrm>
+            <a:off x="2560320" y="4434840"/>
+            <a:ext cx="7040880" cy="822960"/>
+          </a:xfrm>
+          <a:prstGeom prst="roundRect">
+            <a:avLst>
+              <a:gd name="adj" fmla="val 20000"/>
+            </a:avLst>
+          </a:prstGeom>
+          <a:solidFill>
+            <a:srgbClr val="E4F0F1"/>
+          </a:solidFill>
+          <a:ln w="15875">
+            <a:solidFill>
+              <a:srgbClr val="BEDDDF"/>
+            </a:solidFill>
+          </a:ln>
+          <a:effectLst/>
+        </p:spPr>
+        <p:style>
+          <a:lnRef idx="1">
+            <a:schemeClr val="accent1"/>
+          </a:lnRef>
+          <a:fillRef idx="3">
+            <a:schemeClr val="accent1"/>
+          </a:fillRef>
+          <a:effectRef idx="2">
+            <a:schemeClr val="accent1"/>
+          </a:effectRef>
+          <a:fontRef idx="minor">
+            <a:schemeClr val="lt1"/>
+          </a:fontRef>
+        </p:style>
+        <p:txBody>
+          <a:bodyPr rtlCol="0" anchor="ctr"/>
+          <a:lstStyle/>
+          <a:p>
+            <a:pPr algn="ctr"/>
+          </a:p>
+        </p:txBody>
+      </p:sp>
+      <p:sp>
+        <p:nvSpPr>
+          <p:cNvPr id="32" name="TextBox 31"/>
+          <p:cNvSpPr txBox="1"/>
+          <p:nvPr/>
+        </p:nvSpPr>
+        <p:spPr>
+          <a:xfrm>
+            <a:off x="2743200" y="4434840"/>
+            <a:ext cx="6675120" cy="822960"/>
+          </a:xfrm>
+          <a:prstGeom prst="rect">
+            <a:avLst/>
+          </a:prstGeom>
+          <a:noFill/>
+        </p:spPr>
+        <p:txBody>
+          <a:bodyPr wrap="square" anchor="ctr" lIns="0" rIns="0" tIns="0" bIns="0">
+            <a:spAutoFit/>
+          </a:bodyPr>
+          <a:lstStyle/>
+          <a:p>
+            <a:pPr algn="ctr">
+              <a:spcAft>
+                <a:spcPts val="0"/>
+              </a:spcAft>
+            </a:pPr>
+            <a:r>
+              <a:rPr sz="1400" b="1" i="0">
+                <a:solidFill>
+                  <a:srgbClr val="1F5C6B"/>
+                </a:solidFill>
+                <a:latin typeface="Georgia"/>
+              </a:rPr>
+              <a:t>= one knowledge library  </a:t>
+            </a:r>
+            <a:r>
+              <a:rPr sz="1250" b="0" i="0">
+                <a:solidFill>
+                  <a:srgbClr val="17242E"/>
+                </a:solidFill>
+                <a:latin typeface="Georgia"/>
+              </a:rPr>
+              <a:t>— broader than your shelf, still curated, still private.</a:t>
+            </a:r>
+          </a:p>
+        </p:txBody>
+      </p:sp>
+      <p:sp>
+        <p:nvSpPr>
+          <p:cNvPr id="33" name="TextBox 32"/>
+          <p:cNvSpPr txBox="1"/>
+          <p:nvPr/>
+        </p:nvSpPr>
+        <p:spPr>
+          <a:xfrm>
+            <a:off x="822960" y="5394960"/>
+            <a:ext cx="10515600" cy="457200"/>
+          </a:xfrm>
+          <a:prstGeom prst="rect">
+            <a:avLst/>
+          </a:prstGeom>
+          <a:noFill/>
+        </p:spPr>
+        <p:txBody>
+          <a:bodyPr wrap="square" anchor="t" lIns="0" rIns="0" tIns="0" bIns="0">
+            <a:spAutoFit/>
+          </a:bodyPr>
+          <a:lstStyle/>
+          <a:p>
+            <a:pPr algn="ctr">
+              <a:lnSpc>
+                <a:spcPct val="105000"/>
+              </a:lnSpc>
+              <a:spcAft>
+                <a:spcPts val="0"/>
+              </a:spcAft>
+            </a:pPr>
+            <a:r>
+              <a:rPr sz="1100" b="0" i="1">
+                <a:solidFill>
+                  <a:srgbClr val="5A6A72"/>
+                </a:solidFill>
+                <a:latin typeface="Georgia"/>
+              </a:rPr>
+              <a:t>Reference texts are general background, labeled — never a substitute for a current guideline. Every answer shows which of your sources it used.</a:t>
+            </a:r>
+          </a:p>
+        </p:txBody>
+      </p:sp>
+    </p:spTree>
+  </p:cSld>
+  <p:clrMapOvr>
+    <a:masterClrMapping/>
+  </p:clrMapOvr>
+</p:sld>
+</file>
+
+<file path=ppt/slides/slide8.xml><?xml version="1.0" encoding="utf-8"?>
+<p:sld xmlns:a="http://schemas.openxmlformats.org/drawingml/2006/main" xmlns:p="http://schemas.openxmlformats.org/presentationml/2006/main" xmlns:r="http://schemas.openxmlformats.org/officeDocument/2006/relationships">
+  <p:cSld>
+    <p:spTree>
+      <p:nvGrpSpPr>
+        <p:cNvPr id="1" name=""/>
+        <p:cNvGrpSpPr/>
+        <p:nvPr/>
+      </p:nvGrpSpPr>
+      <p:grpSpPr/>
+      <p:sp>
+        <p:nvSpPr>
+          <p:cNvPr id="2" name="Rectangle 1"/>
+          <p:cNvSpPr/>
+          <p:nvPr/>
+        </p:nvSpPr>
+        <p:spPr>
+          <a:xfrm>
+            <a:off x="0" y="0"/>
+            <a:ext cx="12191695" cy="6858000"/>
+          </a:xfrm>
+          <a:prstGeom prst="rect">
+            <a:avLst/>
+          </a:prstGeom>
+          <a:solidFill>
+            <a:srgbClr val="F4F6F5"/>
+          </a:solidFill>
+          <a:ln>
+            <a:noFill/>
+          </a:ln>
+          <a:effectLst/>
+        </p:spPr>
+        <p:style>
+          <a:lnRef idx="1">
+            <a:schemeClr val="accent1"/>
+          </a:lnRef>
+          <a:fillRef idx="3">
+            <a:schemeClr val="accent1"/>
+          </a:fillRef>
+          <a:effectRef idx="2">
+            <a:schemeClr val="accent1"/>
+          </a:effectRef>
+          <a:fontRef idx="minor">
+            <a:schemeClr val="lt1"/>
+          </a:fontRef>
+        </p:style>
+        <p:txBody>
+          <a:bodyPr rtlCol="0" anchor="ctr"/>
+          <a:lstStyle/>
+          <a:p>
+            <a:pPr algn="ctr"/>
+          </a:p>
+        </p:txBody>
+      </p:sp>
+      <p:sp>
+        <p:nvSpPr>
+          <p:cNvPr id="3" name="Rectangle 2"/>
+          <p:cNvSpPr/>
+          <p:nvPr/>
+        </p:nvSpPr>
+        <p:spPr>
+          <a:xfrm>
+            <a:off x="0" y="0"/>
+            <a:ext cx="12191695" cy="658368"/>
+          </a:xfrm>
+          <a:prstGeom prst="rect">
+            <a:avLst/>
+          </a:prstGeom>
+          <a:solidFill>
+            <a:srgbClr val="E4F0F1"/>
+          </a:solidFill>
+          <a:ln>
+            <a:noFill/>
+          </a:ln>
+          <a:effectLst/>
+        </p:spPr>
+        <p:style>
+          <a:lnRef idx="1">
+            <a:schemeClr val="accent1"/>
+          </a:lnRef>
+          <a:fillRef idx="3">
+            <a:schemeClr val="accent1"/>
+          </a:fillRef>
+          <a:effectRef idx="2">
+            <a:schemeClr val="accent1"/>
+          </a:effectRef>
+          <a:fontRef idx="minor">
+            <a:schemeClr val="lt1"/>
+          </a:fontRef>
+        </p:style>
+        <p:txBody>
+          <a:bodyPr rtlCol="0" anchor="ctr"/>
+          <a:lstStyle/>
+          <a:p>
+            <a:pPr algn="ctr"/>
+          </a:p>
+        </p:txBody>
+      </p:sp>
+      <p:sp>
+        <p:nvSpPr>
+          <p:cNvPr id="4" name="Rectangle 3"/>
+          <p:cNvSpPr/>
+          <p:nvPr/>
+        </p:nvSpPr>
+        <p:spPr>
+          <a:xfrm>
+            <a:off x="0" y="658368"/>
+            <a:ext cx="12191695" cy="18288"/>
+          </a:xfrm>
+          <a:prstGeom prst="rect">
+            <a:avLst/>
+          </a:prstGeom>
+          <a:solidFill>
+            <a:srgbClr val="BEDDDF"/>
+          </a:solidFill>
+          <a:ln>
+            <a:noFill/>
+          </a:ln>
+          <a:effectLst/>
+        </p:spPr>
+        <p:style>
+          <a:lnRef idx="1">
+            <a:schemeClr val="accent1"/>
+          </a:lnRef>
+          <a:fillRef idx="3">
+            <a:schemeClr val="accent1"/>
+          </a:fillRef>
+          <a:effectRef idx="2">
+            <a:schemeClr val="accent1"/>
+          </a:effectRef>
+          <a:fontRef idx="minor">
+            <a:schemeClr val="lt1"/>
+          </a:fontRef>
+        </p:style>
+        <p:txBody>
+          <a:bodyPr rtlCol="0" anchor="ctr"/>
+          <a:lstStyle/>
+          <a:p>
+            <a:pPr algn="ctr"/>
+          </a:p>
+        </p:txBody>
+      </p:sp>
+      <p:sp>
+        <p:nvSpPr>
+          <p:cNvPr id="5" name="TextBox 4"/>
+          <p:cNvSpPr txBox="1"/>
+          <p:nvPr/>
+        </p:nvSpPr>
+        <p:spPr>
+          <a:xfrm>
+            <a:off x="822960" y="0"/>
+            <a:ext cx="4572000" cy="658368"/>
+          </a:xfrm>
+          <a:prstGeom prst="rect">
+            <a:avLst/>
+          </a:prstGeom>
+          <a:noFill/>
+        </p:spPr>
+        <p:txBody>
+          <a:bodyPr wrap="square" anchor="ctr" lIns="0" rIns="0" tIns="0" bIns="0">
+            <a:spAutoFit/>
+          </a:bodyPr>
+          <a:lstStyle/>
+          <a:p>
+            <a:pPr algn="l">
+              <a:spcAft>
+                <a:spcPts val="0"/>
+              </a:spcAft>
+            </a:pPr>
+            <a:r>
+              <a:rPr sz="1100" b="1" i="0">
+                <a:solidFill>
+                  <a:srgbClr val="1F5C6B"/>
+                </a:solidFill>
+                <a:latin typeface="Consolas"/>
+              </a:rPr>
+              <a:t>MENTIBLE CLINICAL</a:t>
+            </a:r>
+          </a:p>
+        </p:txBody>
+      </p:sp>
+      <p:sp>
+        <p:nvSpPr>
+          <p:cNvPr id="6" name="TextBox 5"/>
+          <p:cNvSpPr txBox="1"/>
+          <p:nvPr/>
+        </p:nvSpPr>
+        <p:spPr>
+          <a:xfrm>
+            <a:off x="4206240" y="0"/>
+            <a:ext cx="5394960" cy="658368"/>
+          </a:xfrm>
+          <a:prstGeom prst="rect">
+            <a:avLst/>
+          </a:prstGeom>
+          <a:noFill/>
+        </p:spPr>
+        <p:txBody>
+          <a:bodyPr wrap="square" anchor="ctr" lIns="0" rIns="0" tIns="0" bIns="0">
+            <a:spAutoFit/>
+          </a:bodyPr>
+          <a:lstStyle/>
+          <a:p>
+            <a:pPr algn="r">
+              <a:spcAft>
+                <a:spcPts val="0"/>
+              </a:spcAft>
+            </a:pPr>
+            <a:r>
+              <a:rPr sz="1100" b="0" i="0">
+                <a:solidFill>
+                  <a:srgbClr val="5A6A72"/>
+                </a:solidFill>
+                <a:latin typeface="Consolas"/>
+              </a:rPr>
+              <a:t>SECTION 06 — PLAN · UPGRADE</a:t>
+            </a:r>
+          </a:p>
+        </p:txBody>
+      </p:sp>
+      <p:cxnSp>
+        <p:nvCxnSpPr>
+          <p:cNvPr id="7" name="Connector 6"/>
+          <p:cNvCxnSpPr/>
+          <p:nvPr/>
+        </p:nvCxnSpPr>
+        <p:spPr>
+          <a:xfrm>
+            <a:off x="10058400" y="329184"/>
+            <a:ext cx="590702" cy="0"/>
+          </a:xfrm>
+          <a:prstGeom prst="line">
+            <a:avLst/>
+          </a:prstGeom>
+          <a:ln w="22225">
+            <a:solidFill>
+              <a:srgbClr val="C0483C"/>
+            </a:solidFill>
+          </a:ln>
+          <a:effectLst/>
+        </p:spPr>
+        <p:style>
+          <a:lnRef idx="2">
+            <a:schemeClr val="accent1"/>
+          </a:lnRef>
+          <a:fillRef idx="0">
+            <a:schemeClr val="accent1"/>
+          </a:fillRef>
+          <a:effectRef idx="1">
+            <a:schemeClr val="accent1"/>
+          </a:effectRef>
+          <a:fontRef idx="minor">
+            <a:schemeClr val="tx1"/>
+          </a:fontRef>
+        </p:style>
+      </p:cxnSp>
+      <p:cxnSp>
+        <p:nvCxnSpPr>
+          <p:cNvPr id="8" name="Connector 7"/>
+          <p:cNvCxnSpPr/>
+          <p:nvPr/>
+        </p:nvCxnSpPr>
+        <p:spPr>
+          <a:xfrm>
+            <a:off x="10649102" y="329184"/>
+            <a:ext cx="104242" cy="91439"/>
+          </a:xfrm>
+          <a:prstGeom prst="line">
+            <a:avLst/>
+          </a:prstGeom>
+          <a:ln w="22225">
+            <a:solidFill>
+              <a:srgbClr val="C0483C"/>
+            </a:solidFill>
+          </a:ln>
+          <a:effectLst/>
+        </p:spPr>
+        <p:style>
+          <a:lnRef idx="2">
+            <a:schemeClr val="accent1"/>
+          </a:lnRef>
+          <a:fillRef idx="0">
+            <a:schemeClr val="accent1"/>
+          </a:fillRef>
+          <a:effectRef idx="1">
+            <a:schemeClr val="accent1"/>
+          </a:effectRef>
+          <a:fontRef idx="minor">
+            <a:schemeClr val="tx1"/>
+          </a:fontRef>
+        </p:style>
+      </p:cxnSp>
+      <p:cxnSp>
+        <p:nvCxnSpPr>
+          <p:cNvPr id="9" name="Connector 8"/>
+          <p:cNvCxnSpPr/>
+          <p:nvPr/>
+        </p:nvCxnSpPr>
+        <p:spPr>
+          <a:xfrm flipV="1">
+            <a:off x="10753344" y="310896"/>
+            <a:ext cx="86868" cy="109727"/>
+          </a:xfrm>
+          <a:prstGeom prst="line">
+            <a:avLst/>
+          </a:prstGeom>
+          <a:ln w="22225">
+            <a:solidFill>
+              <a:srgbClr val="C0483C"/>
+            </a:solidFill>
+          </a:ln>
+          <a:effectLst/>
+        </p:spPr>
+        <p:style>
+          <a:lnRef idx="2">
+            <a:schemeClr val="accent1"/>
+          </a:lnRef>
+          <a:fillRef idx="0">
+            <a:schemeClr val="accent1"/>
+          </a:fillRef>
+          <a:effectRef idx="1">
+            <a:schemeClr val="accent1"/>
+          </a:effectRef>
+          <a:fontRef idx="minor">
+            <a:schemeClr val="tx1"/>
+          </a:fontRef>
+        </p:style>
+      </p:cxnSp>
+      <p:cxnSp>
+        <p:nvCxnSpPr>
+          <p:cNvPr id="10" name="Connector 9"/>
+          <p:cNvCxnSpPr/>
+          <p:nvPr/>
+        </p:nvCxnSpPr>
+        <p:spPr>
+          <a:xfrm flipV="1">
+            <a:off x="10840212" y="18287"/>
+            <a:ext cx="69494" cy="292609"/>
+          </a:xfrm>
+          <a:prstGeom prst="line">
+            <a:avLst/>
+          </a:prstGeom>
+          <a:ln w="22225">
+            <a:solidFill>
+              <a:srgbClr val="C0483C"/>
+            </a:solidFill>
+          </a:ln>
+          <a:effectLst/>
+        </p:spPr>
+        <p:style>
+          <a:lnRef idx="2">
+            <a:schemeClr val="accent1"/>
+          </a:lnRef>
+          <a:fillRef idx="0">
+            <a:schemeClr val="accent1"/>
+          </a:fillRef>
+          <a:effectRef idx="1">
+            <a:schemeClr val="accent1"/>
+          </a:effectRef>
+          <a:fontRef idx="minor">
+            <a:schemeClr val="tx1"/>
+          </a:fontRef>
+        </p:style>
+      </p:cxnSp>
+      <p:cxnSp>
+        <p:nvCxnSpPr>
+          <p:cNvPr id="11" name="Connector 10"/>
+          <p:cNvCxnSpPr/>
+          <p:nvPr/>
+        </p:nvCxnSpPr>
+        <p:spPr>
+          <a:xfrm>
+            <a:off x="10909706" y="18287"/>
+            <a:ext cx="86868" cy="438913"/>
+          </a:xfrm>
+          <a:prstGeom prst="line">
+            <a:avLst/>
+          </a:prstGeom>
+          <a:ln w="22225">
+            <a:solidFill>
+              <a:srgbClr val="C0483C"/>
+            </a:solidFill>
+          </a:ln>
+          <a:effectLst/>
+        </p:spPr>
+        <p:style>
+          <a:lnRef idx="2">
+            <a:schemeClr val="accent1"/>
+          </a:lnRef>
+          <a:fillRef idx="0">
+            <a:schemeClr val="accent1"/>
+          </a:fillRef>
+          <a:effectRef idx="1">
+            <a:schemeClr val="accent1"/>
+          </a:effectRef>
+          <a:fontRef idx="minor">
+            <a:schemeClr val="tx1"/>
+          </a:fontRef>
+        </p:style>
+      </p:cxnSp>
+      <p:cxnSp>
+        <p:nvCxnSpPr>
+          <p:cNvPr id="12" name="Connector 11"/>
+          <p:cNvCxnSpPr/>
+          <p:nvPr/>
+        </p:nvCxnSpPr>
+        <p:spPr>
+          <a:xfrm flipV="1">
+            <a:off x="10996574" y="329184"/>
+            <a:ext cx="86868" cy="128016"/>
+          </a:xfrm>
+          <a:prstGeom prst="line">
+            <a:avLst/>
+          </a:prstGeom>
+          <a:ln w="22225">
+            <a:solidFill>
+              <a:srgbClr val="C0483C"/>
+            </a:solidFill>
+          </a:ln>
+          <a:effectLst/>
+        </p:spPr>
+        <p:style>
+          <a:lnRef idx="2">
+            <a:schemeClr val="accent1"/>
+          </a:lnRef>
+          <a:fillRef idx="0">
+            <a:schemeClr val="accent1"/>
+          </a:fillRef>
+          <a:effectRef idx="1">
+            <a:schemeClr val="accent1"/>
+          </a:effectRef>
+          <a:fontRef idx="minor">
+            <a:schemeClr val="tx1"/>
+          </a:fontRef>
+        </p:style>
+      </p:cxnSp>
+      <p:cxnSp>
+        <p:nvCxnSpPr>
+          <p:cNvPr id="13" name="Connector 12"/>
+          <p:cNvCxnSpPr/>
+          <p:nvPr/>
+        </p:nvCxnSpPr>
+        <p:spPr>
+          <a:xfrm>
+            <a:off x="11083442" y="329184"/>
+            <a:ext cx="712318" cy="0"/>
+          </a:xfrm>
+          <a:prstGeom prst="line">
+            <a:avLst/>
+          </a:prstGeom>
+          <a:ln w="22225">
+            <a:solidFill>
+              <a:srgbClr val="C0483C"/>
+            </a:solidFill>
+          </a:ln>
+          <a:effectLst/>
+        </p:spPr>
+        <p:style>
+          <a:lnRef idx="2">
+            <a:schemeClr val="accent1"/>
+          </a:lnRef>
+          <a:fillRef idx="0">
+            <a:schemeClr val="accent1"/>
+          </a:fillRef>
+          <a:effectRef idx="1">
+            <a:schemeClr val="accent1"/>
+          </a:effectRef>
+          <a:fontRef idx="minor">
+            <a:schemeClr val="tx1"/>
+          </a:fontRef>
+        </p:style>
+      </p:cxnSp>
+      <p:sp>
+        <p:nvSpPr>
+          <p:cNvPr id="14" name="TextBox 13"/>
+          <p:cNvSpPr txBox="1"/>
+          <p:nvPr/>
+        </p:nvSpPr>
+        <p:spPr>
+          <a:xfrm>
+            <a:off x="822960" y="960120"/>
+            <a:ext cx="10607040" cy="548640"/>
+          </a:xfrm>
+          <a:prstGeom prst="rect">
+            <a:avLst/>
+          </a:prstGeom>
+          <a:noFill/>
+        </p:spPr>
+        <p:txBody>
+          <a:bodyPr wrap="square" anchor="t" lIns="0" rIns="0" tIns="0" bIns="0">
+            <a:spAutoFit/>
+          </a:bodyPr>
+          <a:lstStyle/>
+          <a:p>
+            <a:pPr algn="l">
+              <a:spcAft>
+                <a:spcPts val="0"/>
+              </a:spcAft>
+            </a:pPr>
+            <a:r>
+              <a:rPr sz="2300" b="1" i="0">
+                <a:solidFill>
+                  <a:srgbClr val="17242E"/>
+                </a:solidFill>
+                <a:latin typeface="Georgia"/>
+              </a:rPr>
               <a:t>Take me everywhere — at the bedside, not just the desk</a:t>
             </a:r>
           </a:p>
@@ -10656,7 +11668,7 @@
 </p:sld>
 </file>
 
-<file path=ppt/slides/slide8.xml><?xml version="1.0" encoding="utf-8"?>
+<file path=ppt/slides/slide9.xml><?xml version="1.0" encoding="utf-8"?>
 <p:sld xmlns:a="http://schemas.openxmlformats.org/drawingml/2006/main" xmlns:p="http://schemas.openxmlformats.org/presentationml/2006/main" xmlns:r="http://schemas.openxmlformats.org/officeDocument/2006/relationships">
   <p:cSld>
     <p:spTree>

--- a/docs/adr-033-decks/mentible-for-physicians.pptx
+++ b/docs/adr-033-decks/mentible-for-physicians.pptx
@@ -5163,7 +5163,7 @@
                 </a:solidFill>
                 <a:latin typeface="Georgia"/>
               </a:rPr>
-              <a:t>No sign-up. Nothing leaves your laptop.</a:t>
+              <a:t>No sign-up. Start on your own device.</a:t>
             </a:r>
           </a:p>
         </p:txBody>
@@ -5202,7 +5202,7 @@
                 </a:solidFill>
                 <a:latin typeface="Georgia"/>
               </a:rPr>
-              <a:t>Install me, point me at the material you trust, and we begin — everything stays on your own device.</a:t>
+              <a:t>Install me, point me at the material you trust, and we begin — your library stays on your own device.</a:t>
             </a:r>
           </a:p>
         </p:txBody>

--- a/docs/adr-033-decks/mentible-for-physicians.pptx
+++ b/docs/adr-033-decks/mentible-for-physicians.pptx
@@ -3899,6 +3899,102 @@
                 <a:latin typeface="Consolas"/>
               </a:rPr>
               <a:t>   internal-medicine physician</a:t>
+            </a:r>
+          </a:p>
+        </p:txBody>
+      </p:sp>
+      <p:sp>
+        <p:nvSpPr>
+          <p:cNvPr id="22" name="Rounded Rectangle 21"/>
+          <p:cNvSpPr/>
+          <p:nvPr/>
+        </p:nvSpPr>
+        <p:spPr>
+          <a:xfrm>
+            <a:off x="822960" y="6172200"/>
+            <a:ext cx="10515600" cy="502920"/>
+          </a:xfrm>
+          <a:prstGeom prst="roundRect">
+            <a:avLst>
+              <a:gd name="adj" fmla="val 30000"/>
+            </a:avLst>
+          </a:prstGeom>
+          <a:solidFill>
+            <a:srgbClr val="E4F0F1"/>
+          </a:solidFill>
+          <a:ln w="12700">
+            <a:solidFill>
+              <a:srgbClr val="BEDDDF"/>
+            </a:solidFill>
+          </a:ln>
+          <a:effectLst/>
+        </p:spPr>
+        <p:style>
+          <a:lnRef idx="1">
+            <a:schemeClr val="accent1"/>
+          </a:lnRef>
+          <a:fillRef idx="3">
+            <a:schemeClr val="accent1"/>
+          </a:fillRef>
+          <a:effectRef idx="2">
+            <a:schemeClr val="accent1"/>
+          </a:effectRef>
+          <a:fontRef idx="minor">
+            <a:schemeClr val="lt1"/>
+          </a:fontRef>
+        </p:style>
+        <p:txBody>
+          <a:bodyPr rtlCol="0" anchor="ctr"/>
+          <a:lstStyle/>
+          <a:p>
+            <a:pPr algn="ctr"/>
+          </a:p>
+        </p:txBody>
+      </p:sp>
+      <p:sp>
+        <p:nvSpPr>
+          <p:cNvPr id="23" name="TextBox 22"/>
+          <p:cNvSpPr txBox="1"/>
+          <p:nvPr/>
+        </p:nvSpPr>
+        <p:spPr>
+          <a:xfrm>
+            <a:off x="1051560" y="6172200"/>
+            <a:ext cx="10058400" cy="502920"/>
+          </a:xfrm>
+          <a:prstGeom prst="rect">
+            <a:avLst/>
+          </a:prstGeom>
+          <a:noFill/>
+        </p:spPr>
+        <p:txBody>
+          <a:bodyPr wrap="square" anchor="ctr" lIns="0" rIns="0" tIns="0" bIns="0">
+            <a:spAutoFit/>
+          </a:bodyPr>
+          <a:lstStyle/>
+          <a:p>
+            <a:pPr algn="l">
+              <a:spcAft>
+                <a:spcPts val="0"/>
+              </a:spcAft>
+            </a:pPr>
+            <a:r>
+              <a:rPr sz="1050" b="1" i="0">
+                <a:solidFill>
+                  <a:srgbClr val="1F5C6B"/>
+                </a:solidFill>
+                <a:latin typeface="Consolas"/>
+              </a:rPr>
+              <a:t>◆ PRODUCT VISION — </a:t>
+            </a:r>
+            <a:r>
+              <a:rPr sz="1050" b="0" i="0">
+                <a:solidFill>
+                  <a:srgbClr val="17242E"/>
+                </a:solidFill>
+                <a:latin typeface="Georgia"/>
+              </a:rPr>
+              <a:t>a preview of where Mentible is headed. The grounded AI and private hosted sync shown here are on the roadmap (ADR-029/033), not yet shipped.</a:t>
             </a:r>
           </a:p>
         </p:txBody>
